--- a/public/lessons/year-6-maths/spring/week-18/describe-ratio-relationships/teaching-powerpoint-v1.pptx
+++ b/public/lessons/year-6-maths/spring/week-18/describe-ratio-relationships/teaching-powerpoint-v1.pptx
@@ -2,24 +2,24 @@
 <file path=ppt/presentation.xml><?xml version="1.0" encoding="utf-8"?>
 <p:presentation xmlns:p="http://schemas.openxmlformats.org/presentationml/2006/main">
   <p:sldMasterIdLst>
-    <p:sldMasterId xmlns:r="http://schemas.openxmlformats.org/officeDocument/2006/relationships" id="2147483648" r:id="R8a3c7169dfb346cc"/>
+    <p:sldMasterId xmlns:r="http://schemas.openxmlformats.org/officeDocument/2006/relationships" id="2147483648" r:id="R6b7af847871d44e3"/>
   </p:sldMasterIdLst>
   <p:notesMasterIdLst>
-    <p:notesMasterId xmlns:r="http://schemas.openxmlformats.org/officeDocument/2006/relationships" r:id="R45567f660ba14c3b"/>
+    <p:notesMasterId xmlns:r="http://schemas.openxmlformats.org/officeDocument/2006/relationships" r:id="Re3b12ca6ed974d05"/>
   </p:notesMasterIdLst>
   <p:sldIdLst>
-    <p:sldId xmlns:r="http://schemas.openxmlformats.org/officeDocument/2006/relationships" id="256" r:id="R82b995db58464667"/>
-    <p:sldId xmlns:r="http://schemas.openxmlformats.org/officeDocument/2006/relationships" id="257" r:id="R4b1741b14ca54397"/>
-    <p:sldId xmlns:r="http://schemas.openxmlformats.org/officeDocument/2006/relationships" id="258" r:id="Rc1ce11f758ca4811"/>
-    <p:sldId xmlns:r="http://schemas.openxmlformats.org/officeDocument/2006/relationships" id="259" r:id="R3d7b32207f334da6"/>
-    <p:sldId xmlns:r="http://schemas.openxmlformats.org/officeDocument/2006/relationships" id="260" r:id="Rb18fdf2e03464187"/>
-    <p:sldId xmlns:r="http://schemas.openxmlformats.org/officeDocument/2006/relationships" id="261" r:id="Rd0975b4523f942d3"/>
-    <p:sldId xmlns:r="http://schemas.openxmlformats.org/officeDocument/2006/relationships" id="262" r:id="Rd89cc55dca034680"/>
-    <p:sldId xmlns:r="http://schemas.openxmlformats.org/officeDocument/2006/relationships" id="263" r:id="R003c8e92f07d42cc"/>
-    <p:sldId xmlns:r="http://schemas.openxmlformats.org/officeDocument/2006/relationships" id="264" r:id="Rafca8cbafe8b4bfc"/>
-    <p:sldId xmlns:r="http://schemas.openxmlformats.org/officeDocument/2006/relationships" id="265" r:id="Rb48562b0de814b96"/>
-    <p:sldId xmlns:r="http://schemas.openxmlformats.org/officeDocument/2006/relationships" id="266" r:id="Rd50861aa02ab4d0e"/>
-    <p:sldId xmlns:r="http://schemas.openxmlformats.org/officeDocument/2006/relationships" id="267" r:id="R7191303a672f49b0"/>
+    <p:sldId xmlns:r="http://schemas.openxmlformats.org/officeDocument/2006/relationships" id="256" r:id="R28bc995129b2420a"/>
+    <p:sldId xmlns:r="http://schemas.openxmlformats.org/officeDocument/2006/relationships" id="257" r:id="R776ed62709b84c05"/>
+    <p:sldId xmlns:r="http://schemas.openxmlformats.org/officeDocument/2006/relationships" id="258" r:id="Rfa559619dbfe497a"/>
+    <p:sldId xmlns:r="http://schemas.openxmlformats.org/officeDocument/2006/relationships" id="259" r:id="Rb59c2bba751448bb"/>
+    <p:sldId xmlns:r="http://schemas.openxmlformats.org/officeDocument/2006/relationships" id="260" r:id="R3035b7440ff146d4"/>
+    <p:sldId xmlns:r="http://schemas.openxmlformats.org/officeDocument/2006/relationships" id="261" r:id="R20bf817231ce46da"/>
+    <p:sldId xmlns:r="http://schemas.openxmlformats.org/officeDocument/2006/relationships" id="262" r:id="Ra5ec8ed5e6ad4263"/>
+    <p:sldId xmlns:r="http://schemas.openxmlformats.org/officeDocument/2006/relationships" id="263" r:id="R167934c3cdd449fa"/>
+    <p:sldId xmlns:r="http://schemas.openxmlformats.org/officeDocument/2006/relationships" id="264" r:id="R9b4d759ddd8a4846"/>
+    <p:sldId xmlns:r="http://schemas.openxmlformats.org/officeDocument/2006/relationships" id="265" r:id="R0aad9f8ad0184ed9"/>
+    <p:sldId xmlns:r="http://schemas.openxmlformats.org/officeDocument/2006/relationships" id="266" r:id="R1341cf8e1a4f4ef6"/>
+    <p:sldId xmlns:r="http://schemas.openxmlformats.org/officeDocument/2006/relationships" id="267" r:id="R18f40a82b79d47b7"/>
   </p:sldIdLst>
   <p:sldSz cx="12192000" cy="6858000"/>
   <p:notesSz cx="6858000" cy="9144000"/>
@@ -873,7 +873,7 @@
           <a:lstStyle xmlns:a="http://schemas.openxmlformats.org/drawingml/2006/main"/>
           <a:p xmlns:a="http://schemas.openxmlformats.org/drawingml/2006/main">
             <a:r>
-              <a:t>I do. Reveal the question, setup and each calculation stage one click at a time. Pupils watch before copying. Model answer: 8:12, which simplifies to 2:3.</a:t>
+              <a:t>I do. Reveal the question, then reveal each mathematical change one click at a time. Point to the numbers and operation that changed before moving to the next line. Final answer: 8:12, which simplifies to 2:3.</a:t>
             </a:r>
           </a:p>
         </p:txBody>
@@ -1291,7 +1291,7 @@
   </p:cSld>
   <p:clrMap bg1="lt1" tx1="dk1" bg2="lt2" tx2="dk2" accent1="accent1" accent2="accent2" accent3="accent3" accent4="accent4" accent5="accent5" accent6="accent6" hlink="hlink" folHlink="folHlink"/>
   <p:sldLayoutIdLst>
-    <p:sldLayoutId xmlns:r="http://schemas.openxmlformats.org/officeDocument/2006/relationships" id="2147483649" r:id="Rbecb42aa353c407c"/>
+    <p:sldLayoutId xmlns:r="http://schemas.openxmlformats.org/officeDocument/2006/relationships" id="2147483649" r:id="R6bc476073f1e44a7"/>
   </p:sldLayoutIdLst>
   <p:txStyles>
     <p:titleStyle>
@@ -1842,7 +1842,7 @@
           <p:cNvPr id="12" name="">
             <a:extLst xmlns:a="http://schemas.openxmlformats.org/drawingml/2006/main">
               <a:ext uri="{FF2B5EF4-FFF2-40B4-BE49-F238E27FC236}">
-                <a16:creationId xmlns:a16="http://schemas.microsoft.com/office/drawing/2014/main" id="{2D4CF556-B0B4-44AF-AE2F-ADAB2190AFD1}"/>
+                <a16:creationId xmlns:a16="http://schemas.microsoft.com/office/drawing/2014/main" id="{E7EC089F-92AE-40A6-AC7F-61375C96E3C1}"/>
               </a:ext>
             </a:extLst>
           </p:cNvPr>
@@ -1874,7 +1874,7 @@
           <p:cNvPr id="2" name="">
             <a:extLst xmlns:a="http://schemas.openxmlformats.org/drawingml/2006/main">
               <a:ext uri="{FF2B5EF4-FFF2-40B4-BE49-F238E27FC236}">
-                <a16:creationId xmlns:a16="http://schemas.microsoft.com/office/drawing/2014/main" id="{4785CFFD-D6CC-401A-A314-E28F2CF31FE1}"/>
+                <a16:creationId xmlns:a16="http://schemas.microsoft.com/office/drawing/2014/main" id="{893A4DC6-B915-47FB-9721-F43E87E58AE7}"/>
               </a:ext>
             </a:extLst>
           </p:cNvPr>
@@ -1931,7 +1931,7 @@
           <p:cNvPr id="3" name="">
             <a:extLst xmlns:a="http://schemas.openxmlformats.org/drawingml/2006/main">
               <a:ext uri="{FF2B5EF4-FFF2-40B4-BE49-F238E27FC236}">
-                <a16:creationId xmlns:a16="http://schemas.microsoft.com/office/drawing/2014/main" id="{F96A1FAB-E7B3-4C32-96FD-EF7AB45511B6}"/>
+                <a16:creationId xmlns:a16="http://schemas.microsoft.com/office/drawing/2014/main" id="{B1D3B0A3-F1A6-41D8-98E6-47D874D6EA2F}"/>
               </a:ext>
             </a:extLst>
           </p:cNvPr>
@@ -1965,7 +1965,7 @@
           <p:cNvPr id="4" name="">
             <a:extLst xmlns:a="http://schemas.openxmlformats.org/drawingml/2006/main">
               <a:ext uri="{FF2B5EF4-FFF2-40B4-BE49-F238E27FC236}">
-                <a16:creationId xmlns:a16="http://schemas.microsoft.com/office/drawing/2014/main" id="{A0DFCACE-249F-45DA-A169-0416C123BE87}"/>
+                <a16:creationId xmlns:a16="http://schemas.microsoft.com/office/drawing/2014/main" id="{FB450456-80F9-467F-A80C-EE41947130B7}"/>
               </a:ext>
             </a:extLst>
           </p:cNvPr>
@@ -2022,7 +2022,7 @@
           <p:cNvPr id="5" name="">
             <a:extLst xmlns:a="http://schemas.openxmlformats.org/drawingml/2006/main">
               <a:ext uri="{FF2B5EF4-FFF2-40B4-BE49-F238E27FC236}">
-                <a16:creationId xmlns:a16="http://schemas.microsoft.com/office/drawing/2014/main" id="{B44EE21A-939F-4A89-8966-6C64002ED7B6}"/>
+                <a16:creationId xmlns:a16="http://schemas.microsoft.com/office/drawing/2014/main" id="{DA5B930F-1880-4572-AB8F-6A7A7C9480B7}"/>
               </a:ext>
             </a:extLst>
           </p:cNvPr>
@@ -2079,7 +2079,7 @@
           <p:cNvPr id="6" name="">
             <a:extLst xmlns:a="http://schemas.openxmlformats.org/drawingml/2006/main">
               <a:ext uri="{FF2B5EF4-FFF2-40B4-BE49-F238E27FC236}">
-                <a16:creationId xmlns:a16="http://schemas.microsoft.com/office/drawing/2014/main" id="{C2AD0E6E-5C96-4029-9FEE-60F2A9D6017A}"/>
+                <a16:creationId xmlns:a16="http://schemas.microsoft.com/office/drawing/2014/main" id="{4663D0C7-B6C1-4406-BAC0-DCDCF53FE9ED}"/>
               </a:ext>
             </a:extLst>
           </p:cNvPr>
@@ -2113,7 +2113,7 @@
           <p:cNvPr id="7" name="">
             <a:extLst xmlns:a="http://schemas.openxmlformats.org/drawingml/2006/main">
               <a:ext uri="{FF2B5EF4-FFF2-40B4-BE49-F238E27FC236}">
-                <a16:creationId xmlns:a16="http://schemas.microsoft.com/office/drawing/2014/main" id="{ED92CC58-395A-439D-B3EC-8790E822F577}"/>
+                <a16:creationId xmlns:a16="http://schemas.microsoft.com/office/drawing/2014/main" id="{4CC251A8-2BFC-4CAC-AAE9-EEF9762454AF}"/>
               </a:ext>
             </a:extLst>
           </p:cNvPr>
@@ -2170,7 +2170,7 @@
           <p:cNvPr id="8" name="">
             <a:extLst xmlns:a="http://schemas.openxmlformats.org/drawingml/2006/main">
               <a:ext uri="{FF2B5EF4-FFF2-40B4-BE49-F238E27FC236}">
-                <a16:creationId xmlns:a16="http://schemas.microsoft.com/office/drawing/2014/main" id="{7B4F4E45-8B7D-4E92-B5C9-7852081B1FF7}"/>
+                <a16:creationId xmlns:a16="http://schemas.microsoft.com/office/drawing/2014/main" id="{7A92660C-E299-4337-9FFD-BDDC9BDB16AB}"/>
               </a:ext>
             </a:extLst>
           </p:cNvPr>
@@ -2227,7 +2227,7 @@
           <p:cNvPr id="9" name="">
             <a:extLst xmlns:a="http://schemas.openxmlformats.org/drawingml/2006/main">
               <a:ext uri="{FF2B5EF4-FFF2-40B4-BE49-F238E27FC236}">
-                <a16:creationId xmlns:a16="http://schemas.microsoft.com/office/drawing/2014/main" id="{60623879-9C89-4DE4-A485-1EF6DF814346}"/>
+                <a16:creationId xmlns:a16="http://schemas.microsoft.com/office/drawing/2014/main" id="{705E86CE-CCDC-4A84-8149-369F34030FFF}"/>
               </a:ext>
             </a:extLst>
           </p:cNvPr>
@@ -2284,7 +2284,7 @@
           <p:cNvPr id="10" name="">
             <a:extLst xmlns:a="http://schemas.openxmlformats.org/drawingml/2006/main">
               <a:ext uri="{FF2B5EF4-FFF2-40B4-BE49-F238E27FC236}">
-                <a16:creationId xmlns:a16="http://schemas.microsoft.com/office/drawing/2014/main" id="{FBE80582-2E89-4BB6-B813-D9142A440478}"/>
+                <a16:creationId xmlns:a16="http://schemas.microsoft.com/office/drawing/2014/main" id="{3314C7F0-B3E7-457F-87E5-EAB29D1473AC}"/>
               </a:ext>
             </a:extLst>
           </p:cNvPr>
@@ -2341,7 +2341,7 @@
           <p:cNvPr id="11" name="">
             <a:extLst xmlns:a="http://schemas.openxmlformats.org/drawingml/2006/main">
               <a:ext uri="{FF2B5EF4-FFF2-40B4-BE49-F238E27FC236}">
-                <a16:creationId xmlns:a16="http://schemas.microsoft.com/office/drawing/2014/main" id="{3224D820-E13C-42DD-A03B-29F78FEB558B}"/>
+                <a16:creationId xmlns:a16="http://schemas.microsoft.com/office/drawing/2014/main" id="{2B206428-6DF0-4867-ACEE-5D71189A3A3A}"/>
               </a:ext>
             </a:extLst>
           </p:cNvPr>
@@ -2396,7 +2396,7 @@
     </p:spTree>
     <p:extLst>
       <p:ext uri="{BB962C8B-B14F-4D97-AF65-F5344CB8AC3E}">
-        <p14:creationId xmlns:p14="http://schemas.microsoft.com/office/powerpoint/2010/main" val="113812997"/>
+        <p14:creationId xmlns:p14="http://schemas.microsoft.com/office/powerpoint/2010/main" val="4741124"/>
       </p:ext>
     </p:extLst>
   </p:cSld>
@@ -2427,7 +2427,7 @@
           <p:cNvPr id="14" name="">
             <a:extLst xmlns:a="http://schemas.openxmlformats.org/drawingml/2006/main">
               <a:ext uri="{FF2B5EF4-FFF2-40B4-BE49-F238E27FC236}">
-                <a16:creationId xmlns:a16="http://schemas.microsoft.com/office/drawing/2014/main" id="{87A30C7E-5147-4F4E-B254-2DB9AECBD837}"/>
+                <a16:creationId xmlns:a16="http://schemas.microsoft.com/office/drawing/2014/main" id="{D2158A8D-4564-400F-B8FD-3D19ECF46D3C}"/>
               </a:ext>
             </a:extLst>
           </p:cNvPr>
@@ -2459,7 +2459,7 @@
           <p:cNvPr id="2" name="">
             <a:extLst xmlns:a="http://schemas.openxmlformats.org/drawingml/2006/main">
               <a:ext uri="{FF2B5EF4-FFF2-40B4-BE49-F238E27FC236}">
-                <a16:creationId xmlns:a16="http://schemas.microsoft.com/office/drawing/2014/main" id="{6CBF4187-F51D-41C6-82BD-CF731A5658F1}"/>
+                <a16:creationId xmlns:a16="http://schemas.microsoft.com/office/drawing/2014/main" id="{6A2AEAF1-9DB1-4B32-9BAE-05336337C2C4}"/>
               </a:ext>
             </a:extLst>
           </p:cNvPr>
@@ -2516,7 +2516,7 @@
           <p:cNvPr id="3" name="">
             <a:extLst xmlns:a="http://schemas.openxmlformats.org/drawingml/2006/main">
               <a:ext uri="{FF2B5EF4-FFF2-40B4-BE49-F238E27FC236}">
-                <a16:creationId xmlns:a16="http://schemas.microsoft.com/office/drawing/2014/main" id="{B9722E3C-DB0F-48F9-A5C4-3BE01759AFF0}"/>
+                <a16:creationId xmlns:a16="http://schemas.microsoft.com/office/drawing/2014/main" id="{CDFD9B0F-8898-48CA-BE0A-235B6BFBB5B3}"/>
               </a:ext>
             </a:extLst>
           </p:cNvPr>
@@ -2548,7 +2548,7 @@
           <p:cNvPr id="4" name="">
             <a:extLst xmlns:a="http://schemas.openxmlformats.org/drawingml/2006/main">
               <a:ext uri="{FF2B5EF4-FFF2-40B4-BE49-F238E27FC236}">
-                <a16:creationId xmlns:a16="http://schemas.microsoft.com/office/drawing/2014/main" id="{C6622A11-032D-4EC2-AAA2-C630CC8E82B5}"/>
+                <a16:creationId xmlns:a16="http://schemas.microsoft.com/office/drawing/2014/main" id="{DD329844-E398-445C-8B9A-5EBF34D4D51D}"/>
               </a:ext>
             </a:extLst>
           </p:cNvPr>
@@ -2605,7 +2605,7 @@
           <p:cNvPr id="5" name="">
             <a:extLst xmlns:a="http://schemas.openxmlformats.org/drawingml/2006/main">
               <a:ext uri="{FF2B5EF4-FFF2-40B4-BE49-F238E27FC236}">
-                <a16:creationId xmlns:a16="http://schemas.microsoft.com/office/drawing/2014/main" id="{2BB1D118-5977-4822-82A4-0C3B219442FE}"/>
+                <a16:creationId xmlns:a16="http://schemas.microsoft.com/office/drawing/2014/main" id="{5E538B88-DB00-4CBE-8AB7-3DFD631C9E1A}"/>
               </a:ext>
             </a:extLst>
           </p:cNvPr>
@@ -2662,7 +2662,7 @@
           <p:cNvPr id="6" name="">
             <a:extLst xmlns:a="http://schemas.openxmlformats.org/drawingml/2006/main">
               <a:ext uri="{FF2B5EF4-FFF2-40B4-BE49-F238E27FC236}">
-                <a16:creationId xmlns:a16="http://schemas.microsoft.com/office/drawing/2014/main" id="{B9668661-1E98-4B83-A302-D394BE8AA909}"/>
+                <a16:creationId xmlns:a16="http://schemas.microsoft.com/office/drawing/2014/main" id="{8DAE144E-F26F-4F25-A093-195E04CCE9BA}"/>
               </a:ext>
             </a:extLst>
           </p:cNvPr>
@@ -2719,7 +2719,7 @@
           <p:cNvPr id="7" name="">
             <a:extLst xmlns:a="http://schemas.openxmlformats.org/drawingml/2006/main">
               <a:ext uri="{FF2B5EF4-FFF2-40B4-BE49-F238E27FC236}">
-                <a16:creationId xmlns:a16="http://schemas.microsoft.com/office/drawing/2014/main" id="{0E21ABCD-7728-45DD-BA5D-E5B7BC19C533}"/>
+                <a16:creationId xmlns:a16="http://schemas.microsoft.com/office/drawing/2014/main" id="{C862036B-FEFD-4350-AC47-904AD7960ABA}"/>
               </a:ext>
             </a:extLst>
           </p:cNvPr>
@@ -2751,7 +2751,7 @@
           <p:cNvPr id="8" name="">
             <a:extLst xmlns:a="http://schemas.openxmlformats.org/drawingml/2006/main">
               <a:ext uri="{FF2B5EF4-FFF2-40B4-BE49-F238E27FC236}">
-                <a16:creationId xmlns:a16="http://schemas.microsoft.com/office/drawing/2014/main" id="{CAA228A3-5C95-4544-8F9B-170E2D4CD0C8}"/>
+                <a16:creationId xmlns:a16="http://schemas.microsoft.com/office/drawing/2014/main" id="{E2BE2C75-BC15-4324-AA9E-1360AE813EEA}"/>
               </a:ext>
             </a:extLst>
           </p:cNvPr>
@@ -2808,7 +2808,7 @@
           <p:cNvPr id="9" name="">
             <a:extLst xmlns:a="http://schemas.openxmlformats.org/drawingml/2006/main">
               <a:ext uri="{FF2B5EF4-FFF2-40B4-BE49-F238E27FC236}">
-                <a16:creationId xmlns:a16="http://schemas.microsoft.com/office/drawing/2014/main" id="{B783D31B-DDAE-45AE-9663-855DA10A476D}"/>
+                <a16:creationId xmlns:a16="http://schemas.microsoft.com/office/drawing/2014/main" id="{44E35CEA-945E-4EEB-9ADE-3AFBD9691C91}"/>
               </a:ext>
             </a:extLst>
           </p:cNvPr>
@@ -2865,7 +2865,7 @@
           <p:cNvPr id="10" name="">
             <a:extLst xmlns:a="http://schemas.openxmlformats.org/drawingml/2006/main">
               <a:ext uri="{FF2B5EF4-FFF2-40B4-BE49-F238E27FC236}">
-                <a16:creationId xmlns:a16="http://schemas.microsoft.com/office/drawing/2014/main" id="{116FB51B-5022-4E6A-9E8E-1AF4F2BB0B10}"/>
+                <a16:creationId xmlns:a16="http://schemas.microsoft.com/office/drawing/2014/main" id="{26B008C5-055F-4989-A022-E64DBC18E8E3}"/>
               </a:ext>
             </a:extLst>
           </p:cNvPr>
@@ -2922,7 +2922,7 @@
           <p:cNvPr id="11" name="">
             <a:extLst xmlns:a="http://schemas.openxmlformats.org/drawingml/2006/main">
               <a:ext uri="{FF2B5EF4-FFF2-40B4-BE49-F238E27FC236}">
-                <a16:creationId xmlns:a16="http://schemas.microsoft.com/office/drawing/2014/main" id="{F3711A57-A1B7-4466-AE5D-9759C950EBE2}"/>
+                <a16:creationId xmlns:a16="http://schemas.microsoft.com/office/drawing/2014/main" id="{B611E7E9-F300-4532-85BF-CEBF82FFC1DA}"/>
               </a:ext>
             </a:extLst>
           </p:cNvPr>
@@ -2979,7 +2979,7 @@
           <p:cNvPr id="12" name="">
             <a:extLst xmlns:a="http://schemas.openxmlformats.org/drawingml/2006/main">
               <a:ext uri="{FF2B5EF4-FFF2-40B4-BE49-F238E27FC236}">
-                <a16:creationId xmlns:a16="http://schemas.microsoft.com/office/drawing/2014/main" id="{97EBE548-EA56-4BF5-9083-21648C68D7C7}"/>
+                <a16:creationId xmlns:a16="http://schemas.microsoft.com/office/drawing/2014/main" id="{EE3EAFA2-90C0-4F1E-8DC2-2F01976D3EDE}"/>
               </a:ext>
             </a:extLst>
           </p:cNvPr>
@@ -3036,7 +3036,7 @@
           <p:cNvPr id="13" name="">
             <a:extLst xmlns:a="http://schemas.openxmlformats.org/drawingml/2006/main">
               <a:ext uri="{FF2B5EF4-FFF2-40B4-BE49-F238E27FC236}">
-                <a16:creationId xmlns:a16="http://schemas.microsoft.com/office/drawing/2014/main" id="{CC44626C-0153-4729-8329-1E6340ED935C}"/>
+                <a16:creationId xmlns:a16="http://schemas.microsoft.com/office/drawing/2014/main" id="{7E22C239-ECD5-460E-B7B5-0E6CBBAB3C3F}"/>
               </a:ext>
             </a:extLst>
           </p:cNvPr>
@@ -3091,7 +3091,7 @@
     </p:spTree>
     <p:extLst>
       <p:ext uri="{BB962C8B-B14F-4D97-AF65-F5344CB8AC3E}">
-        <p14:creationId xmlns:p14="http://schemas.microsoft.com/office/powerpoint/2010/main" val="161600411"/>
+        <p14:creationId xmlns:p14="http://schemas.microsoft.com/office/powerpoint/2010/main" val="560379836"/>
       </p:ext>
     </p:extLst>
   </p:cSld>
@@ -3292,7 +3292,7 @@
           <p:cNvPr id="19" name="">
             <a:extLst xmlns:a="http://schemas.openxmlformats.org/drawingml/2006/main">
               <a:ext uri="{FF2B5EF4-FFF2-40B4-BE49-F238E27FC236}">
-                <a16:creationId xmlns:a16="http://schemas.microsoft.com/office/drawing/2014/main" id="{E0E3E498-DDD0-4320-BFF1-9DD6BCC85C9C}"/>
+                <a16:creationId xmlns:a16="http://schemas.microsoft.com/office/drawing/2014/main" id="{FA938287-D27C-469C-8DA6-4571039D209E}"/>
               </a:ext>
             </a:extLst>
           </p:cNvPr>
@@ -3324,7 +3324,7 @@
           <p:cNvPr id="2" name="">
             <a:extLst xmlns:a="http://schemas.openxmlformats.org/drawingml/2006/main">
               <a:ext uri="{FF2B5EF4-FFF2-40B4-BE49-F238E27FC236}">
-                <a16:creationId xmlns:a16="http://schemas.microsoft.com/office/drawing/2014/main" id="{9DBB98BE-C5DE-49F8-8953-F41493172495}"/>
+                <a16:creationId xmlns:a16="http://schemas.microsoft.com/office/drawing/2014/main" id="{9AE1A823-84AD-4473-9F33-24B3D6A4B22F}"/>
               </a:ext>
             </a:extLst>
           </p:cNvPr>
@@ -3381,7 +3381,7 @@
           <p:cNvPr id="3" name="">
             <a:extLst xmlns:a="http://schemas.openxmlformats.org/drawingml/2006/main">
               <a:ext uri="{FF2B5EF4-FFF2-40B4-BE49-F238E27FC236}">
-                <a16:creationId xmlns:a16="http://schemas.microsoft.com/office/drawing/2014/main" id="{047EFCD7-74EA-4939-9079-21DABFA6A68E}"/>
+                <a16:creationId xmlns:a16="http://schemas.microsoft.com/office/drawing/2014/main" id="{C80C4A10-0C9F-4D06-86A0-189A283F1A68}"/>
               </a:ext>
             </a:extLst>
           </p:cNvPr>
@@ -3413,7 +3413,7 @@
           <p:cNvPr id="4" name="">
             <a:extLst xmlns:a="http://schemas.openxmlformats.org/drawingml/2006/main">
               <a:ext uri="{FF2B5EF4-FFF2-40B4-BE49-F238E27FC236}">
-                <a16:creationId xmlns:a16="http://schemas.microsoft.com/office/drawing/2014/main" id="{FBBA34B5-267A-444C-8F20-A32F0D449D81}"/>
+                <a16:creationId xmlns:a16="http://schemas.microsoft.com/office/drawing/2014/main" id="{2BA7E51D-A5EF-4B66-9281-60A7A31F26DA}"/>
               </a:ext>
             </a:extLst>
           </p:cNvPr>
@@ -3470,7 +3470,7 @@
           <p:cNvPr id="5" name="">
             <a:extLst xmlns:a="http://schemas.openxmlformats.org/drawingml/2006/main">
               <a:ext uri="{FF2B5EF4-FFF2-40B4-BE49-F238E27FC236}">
-                <a16:creationId xmlns:a16="http://schemas.microsoft.com/office/drawing/2014/main" id="{95607489-556E-42CD-8EFB-164B937749C4}"/>
+                <a16:creationId xmlns:a16="http://schemas.microsoft.com/office/drawing/2014/main" id="{573BCA90-C030-4C5C-AF3E-211B750690BD}"/>
               </a:ext>
             </a:extLst>
           </p:cNvPr>
@@ -3527,7 +3527,7 @@
           <p:cNvPr id="6" name="">
             <a:extLst xmlns:a="http://schemas.openxmlformats.org/drawingml/2006/main">
               <a:ext uri="{FF2B5EF4-FFF2-40B4-BE49-F238E27FC236}">
-                <a16:creationId xmlns:a16="http://schemas.microsoft.com/office/drawing/2014/main" id="{40B795B1-BB53-42B5-B9B6-8C090AA2D7AD}"/>
+                <a16:creationId xmlns:a16="http://schemas.microsoft.com/office/drawing/2014/main" id="{A8361684-F7EC-43D8-8DD4-0CE4F681E77B}"/>
               </a:ext>
             </a:extLst>
           </p:cNvPr>
@@ -3584,7 +3584,7 @@
           <p:cNvPr id="7" name="">
             <a:extLst xmlns:a="http://schemas.openxmlformats.org/drawingml/2006/main">
               <a:ext uri="{FF2B5EF4-FFF2-40B4-BE49-F238E27FC236}">
-                <a16:creationId xmlns:a16="http://schemas.microsoft.com/office/drawing/2014/main" id="{8DB258FE-53E2-4B53-90F8-DB4CBA4C9B06}"/>
+                <a16:creationId xmlns:a16="http://schemas.microsoft.com/office/drawing/2014/main" id="{91AF3856-A034-4EF8-B93B-0FF827261B2F}"/>
               </a:ext>
             </a:extLst>
           </p:cNvPr>
@@ -3616,7 +3616,7 @@
           <p:cNvPr id="8" name="">
             <a:extLst xmlns:a="http://schemas.openxmlformats.org/drawingml/2006/main">
               <a:ext uri="{FF2B5EF4-FFF2-40B4-BE49-F238E27FC236}">
-                <a16:creationId xmlns:a16="http://schemas.microsoft.com/office/drawing/2014/main" id="{5DC3A07C-5395-4F71-8648-174251481E8E}"/>
+                <a16:creationId xmlns:a16="http://schemas.microsoft.com/office/drawing/2014/main" id="{A7167C74-C53D-4EAD-B87C-2D257AFC7199}"/>
               </a:ext>
             </a:extLst>
           </p:cNvPr>
@@ -3673,7 +3673,7 @@
           <p:cNvPr id="9" name="">
             <a:extLst xmlns:a="http://schemas.openxmlformats.org/drawingml/2006/main">
               <a:ext uri="{FF2B5EF4-FFF2-40B4-BE49-F238E27FC236}">
-                <a16:creationId xmlns:a16="http://schemas.microsoft.com/office/drawing/2014/main" id="{FE9E39D3-DC87-4539-AE45-4EB866D1C65C}"/>
+                <a16:creationId xmlns:a16="http://schemas.microsoft.com/office/drawing/2014/main" id="{3C009F06-FD9E-4A34-B1AD-90AB2C1F79D4}"/>
               </a:ext>
             </a:extLst>
           </p:cNvPr>
@@ -3730,7 +3730,7 @@
           <p:cNvPr id="10" name="">
             <a:extLst xmlns:a="http://schemas.openxmlformats.org/drawingml/2006/main">
               <a:ext uri="{FF2B5EF4-FFF2-40B4-BE49-F238E27FC236}">
-                <a16:creationId xmlns:a16="http://schemas.microsoft.com/office/drawing/2014/main" id="{50E9EB4F-26FD-459E-9118-2421772F1691}"/>
+                <a16:creationId xmlns:a16="http://schemas.microsoft.com/office/drawing/2014/main" id="{CC06AF3A-8E4C-47EF-9F7F-92C516C95AD0}"/>
               </a:ext>
             </a:extLst>
           </p:cNvPr>
@@ -3787,7 +3787,7 @@
           <p:cNvPr id="11" name="">
             <a:extLst xmlns:a="http://schemas.openxmlformats.org/drawingml/2006/main">
               <a:ext uri="{FF2B5EF4-FFF2-40B4-BE49-F238E27FC236}">
-                <a16:creationId xmlns:a16="http://schemas.microsoft.com/office/drawing/2014/main" id="{93A2C1BF-3860-4C3E-9F02-94EF8D628EA5}"/>
+                <a16:creationId xmlns:a16="http://schemas.microsoft.com/office/drawing/2014/main" id="{EFA71707-3F36-4A4E-A928-7C3D3E009C73}"/>
               </a:ext>
             </a:extLst>
           </p:cNvPr>
@@ -3821,7 +3821,7 @@
           <p:cNvPr id="12" name="">
             <a:extLst xmlns:a="http://schemas.openxmlformats.org/drawingml/2006/main">
               <a:ext uri="{FF2B5EF4-FFF2-40B4-BE49-F238E27FC236}">
-                <a16:creationId xmlns:a16="http://schemas.microsoft.com/office/drawing/2014/main" id="{017B5BA9-0B95-4942-BA25-2DECB23E96C0}"/>
+                <a16:creationId xmlns:a16="http://schemas.microsoft.com/office/drawing/2014/main" id="{54072E95-A64B-4D8A-90B9-061A2C35EEBF}"/>
               </a:ext>
             </a:extLst>
           </p:cNvPr>
@@ -3878,7 +3878,7 @@
           <p:cNvPr id="13" name="">
             <a:extLst xmlns:a="http://schemas.openxmlformats.org/drawingml/2006/main">
               <a:ext uri="{FF2B5EF4-FFF2-40B4-BE49-F238E27FC236}">
-                <a16:creationId xmlns:a16="http://schemas.microsoft.com/office/drawing/2014/main" id="{C6086205-1161-41D0-8814-ACE2198C3915}"/>
+                <a16:creationId xmlns:a16="http://schemas.microsoft.com/office/drawing/2014/main" id="{6164F11B-4025-497D-861A-F3B6171A334F}"/>
               </a:ext>
             </a:extLst>
           </p:cNvPr>
@@ -3935,7 +3935,7 @@
           <p:cNvPr id="14" name="">
             <a:extLst xmlns:a="http://schemas.openxmlformats.org/drawingml/2006/main">
               <a:ext uri="{FF2B5EF4-FFF2-40B4-BE49-F238E27FC236}">
-                <a16:creationId xmlns:a16="http://schemas.microsoft.com/office/drawing/2014/main" id="{21A003FD-6495-4E0E-931E-F0BE0C0A3FB9}"/>
+                <a16:creationId xmlns:a16="http://schemas.microsoft.com/office/drawing/2014/main" id="{850F8887-681B-4492-9F6E-BF5B10B4EAF8}"/>
               </a:ext>
             </a:extLst>
           </p:cNvPr>
@@ -3992,7 +3992,7 @@
           <p:cNvPr id="15" name="">
             <a:extLst xmlns:a="http://schemas.openxmlformats.org/drawingml/2006/main">
               <a:ext uri="{FF2B5EF4-FFF2-40B4-BE49-F238E27FC236}">
-                <a16:creationId xmlns:a16="http://schemas.microsoft.com/office/drawing/2014/main" id="{18570657-A242-4DD5-899F-7CCC760D3511}"/>
+                <a16:creationId xmlns:a16="http://schemas.microsoft.com/office/drawing/2014/main" id="{B504FE50-F026-461C-80E2-B2F1C2D0D216}"/>
               </a:ext>
             </a:extLst>
           </p:cNvPr>
@@ -4026,7 +4026,7 @@
           <p:cNvPr id="16" name="">
             <a:extLst xmlns:a="http://schemas.openxmlformats.org/drawingml/2006/main">
               <a:ext uri="{FF2B5EF4-FFF2-40B4-BE49-F238E27FC236}">
-                <a16:creationId xmlns:a16="http://schemas.microsoft.com/office/drawing/2014/main" id="{E353C283-391C-42A2-AD25-62D077475D68}"/>
+                <a16:creationId xmlns:a16="http://schemas.microsoft.com/office/drawing/2014/main" id="{BF5AEDE1-0077-4285-A498-5384D850BED0}"/>
               </a:ext>
             </a:extLst>
           </p:cNvPr>
@@ -4083,7 +4083,7 @@
           <p:cNvPr id="17" name="">
             <a:extLst xmlns:a="http://schemas.openxmlformats.org/drawingml/2006/main">
               <a:ext uri="{FF2B5EF4-FFF2-40B4-BE49-F238E27FC236}">
-                <a16:creationId xmlns:a16="http://schemas.microsoft.com/office/drawing/2014/main" id="{37F9C8CA-F69A-46D5-9FF9-FDFFB364BBB5}"/>
+                <a16:creationId xmlns:a16="http://schemas.microsoft.com/office/drawing/2014/main" id="{A3D70CCE-CD51-4995-8C26-B2D0907202D3}"/>
               </a:ext>
             </a:extLst>
           </p:cNvPr>
@@ -4140,7 +4140,7 @@
           <p:cNvPr id="18" name="">
             <a:extLst xmlns:a="http://schemas.openxmlformats.org/drawingml/2006/main">
               <a:ext uri="{FF2B5EF4-FFF2-40B4-BE49-F238E27FC236}">
-                <a16:creationId xmlns:a16="http://schemas.microsoft.com/office/drawing/2014/main" id="{FD83958F-995D-4AA6-A706-845C2A1DC64E}"/>
+                <a16:creationId xmlns:a16="http://schemas.microsoft.com/office/drawing/2014/main" id="{632C3ED6-0297-403B-904F-5586FE6C9A71}"/>
               </a:ext>
             </a:extLst>
           </p:cNvPr>
@@ -4195,7 +4195,7 @@
     </p:spTree>
     <p:extLst>
       <p:ext uri="{BB962C8B-B14F-4D97-AF65-F5344CB8AC3E}">
-        <p14:creationId xmlns:p14="http://schemas.microsoft.com/office/powerpoint/2010/main" val="1360045537"/>
+        <p14:creationId xmlns:p14="http://schemas.microsoft.com/office/powerpoint/2010/main" val="1750990474"/>
       </p:ext>
     </p:extLst>
   </p:cSld>
@@ -4350,7 +4350,7 @@
           <p:cNvPr id="23" name="">
             <a:extLst xmlns:a="http://schemas.openxmlformats.org/drawingml/2006/main">
               <a:ext uri="{FF2B5EF4-FFF2-40B4-BE49-F238E27FC236}">
-                <a16:creationId xmlns:a16="http://schemas.microsoft.com/office/drawing/2014/main" id="{E5792B2C-2DB1-4737-9BCC-EB983CD441C2}"/>
+                <a16:creationId xmlns:a16="http://schemas.microsoft.com/office/drawing/2014/main" id="{E53E1845-FA3C-4562-8D60-4DDADC6BD82E}"/>
               </a:ext>
             </a:extLst>
           </p:cNvPr>
@@ -4382,7 +4382,7 @@
           <p:cNvPr id="2" name="">
             <a:extLst xmlns:a="http://schemas.openxmlformats.org/drawingml/2006/main">
               <a:ext uri="{FF2B5EF4-FFF2-40B4-BE49-F238E27FC236}">
-                <a16:creationId xmlns:a16="http://schemas.microsoft.com/office/drawing/2014/main" id="{4088B6BC-3171-444E-A4AF-E78D1BB3478F}"/>
+                <a16:creationId xmlns:a16="http://schemas.microsoft.com/office/drawing/2014/main" id="{BE0BA8BA-70DD-4997-961B-7E6B5433B700}"/>
               </a:ext>
             </a:extLst>
           </p:cNvPr>
@@ -4439,7 +4439,7 @@
           <p:cNvPr id="3" name="">
             <a:extLst xmlns:a="http://schemas.openxmlformats.org/drawingml/2006/main">
               <a:ext uri="{FF2B5EF4-FFF2-40B4-BE49-F238E27FC236}">
-                <a16:creationId xmlns:a16="http://schemas.microsoft.com/office/drawing/2014/main" id="{DEC2D021-75BC-4973-9C71-3DB4A6FCF9F3}"/>
+                <a16:creationId xmlns:a16="http://schemas.microsoft.com/office/drawing/2014/main" id="{A8BE9838-24D3-4038-8712-E84DBA644989}"/>
               </a:ext>
             </a:extLst>
           </p:cNvPr>
@@ -4471,7 +4471,7 @@
           <p:cNvPr id="4" name="">
             <a:extLst xmlns:a="http://schemas.openxmlformats.org/drawingml/2006/main">
               <a:ext uri="{FF2B5EF4-FFF2-40B4-BE49-F238E27FC236}">
-                <a16:creationId xmlns:a16="http://schemas.microsoft.com/office/drawing/2014/main" id="{26FB6836-D2D4-44B0-9435-A0D01A325856}"/>
+                <a16:creationId xmlns:a16="http://schemas.microsoft.com/office/drawing/2014/main" id="{A62106AD-2E5E-4826-A5B3-D35F49CC7FB9}"/>
               </a:ext>
             </a:extLst>
           </p:cNvPr>
@@ -4528,7 +4528,7 @@
           <p:cNvPr id="5" name="">
             <a:extLst xmlns:a="http://schemas.openxmlformats.org/drawingml/2006/main">
               <a:ext uri="{FF2B5EF4-FFF2-40B4-BE49-F238E27FC236}">
-                <a16:creationId xmlns:a16="http://schemas.microsoft.com/office/drawing/2014/main" id="{26B5C817-200A-4CEB-8D0F-6DD6E79968D5}"/>
+                <a16:creationId xmlns:a16="http://schemas.microsoft.com/office/drawing/2014/main" id="{F6C25772-16DD-465C-AE08-3FA822482432}"/>
               </a:ext>
             </a:extLst>
           </p:cNvPr>
@@ -4585,7 +4585,7 @@
           <p:cNvPr id="6" name="">
             <a:extLst xmlns:a="http://schemas.openxmlformats.org/drawingml/2006/main">
               <a:ext uri="{FF2B5EF4-FFF2-40B4-BE49-F238E27FC236}">
-                <a16:creationId xmlns:a16="http://schemas.microsoft.com/office/drawing/2014/main" id="{1B5DC19A-1A75-414B-A7D8-4D04D9137C2D}"/>
+                <a16:creationId xmlns:a16="http://schemas.microsoft.com/office/drawing/2014/main" id="{3C8FD358-BDE1-406A-A8F3-909073888F97}"/>
               </a:ext>
             </a:extLst>
           </p:cNvPr>
@@ -4642,7 +4642,7 @@
           <p:cNvPr id="7" name="">
             <a:extLst xmlns:a="http://schemas.openxmlformats.org/drawingml/2006/main">
               <a:ext uri="{FF2B5EF4-FFF2-40B4-BE49-F238E27FC236}">
-                <a16:creationId xmlns:a16="http://schemas.microsoft.com/office/drawing/2014/main" id="{5204B0C8-B08F-43D9-9407-CA6130C7CF8D}"/>
+                <a16:creationId xmlns:a16="http://schemas.microsoft.com/office/drawing/2014/main" id="{ED0C67FC-B220-4B76-BF76-99E4C8E83048}"/>
               </a:ext>
             </a:extLst>
           </p:cNvPr>
@@ -4674,7 +4674,7 @@
           <p:cNvPr id="8" name="">
             <a:extLst xmlns:a="http://schemas.openxmlformats.org/drawingml/2006/main">
               <a:ext uri="{FF2B5EF4-FFF2-40B4-BE49-F238E27FC236}">
-                <a16:creationId xmlns:a16="http://schemas.microsoft.com/office/drawing/2014/main" id="{394250FE-1E19-46D8-BEB8-B90C883F7F65}"/>
+                <a16:creationId xmlns:a16="http://schemas.microsoft.com/office/drawing/2014/main" id="{7F87EE83-22DE-4071-A81D-53EA70842B5B}"/>
               </a:ext>
             </a:extLst>
           </p:cNvPr>
@@ -4731,7 +4731,7 @@
           <p:cNvPr id="9" name="">
             <a:extLst xmlns:a="http://schemas.openxmlformats.org/drawingml/2006/main">
               <a:ext uri="{FF2B5EF4-FFF2-40B4-BE49-F238E27FC236}">
-                <a16:creationId xmlns:a16="http://schemas.microsoft.com/office/drawing/2014/main" id="{3B49BAB4-3F35-466D-BAD7-7B88EABC56B3}"/>
+                <a16:creationId xmlns:a16="http://schemas.microsoft.com/office/drawing/2014/main" id="{80FA6E6D-F0CC-49C9-BE77-69EE905E385D}"/>
               </a:ext>
             </a:extLst>
           </p:cNvPr>
@@ -4788,7 +4788,7 @@
           <p:cNvPr id="10" name="">
             <a:extLst xmlns:a="http://schemas.openxmlformats.org/drawingml/2006/main">
               <a:ext uri="{FF2B5EF4-FFF2-40B4-BE49-F238E27FC236}">
-                <a16:creationId xmlns:a16="http://schemas.microsoft.com/office/drawing/2014/main" id="{36EC9B37-F96A-4CC7-8E22-12337B403A1B}"/>
+                <a16:creationId xmlns:a16="http://schemas.microsoft.com/office/drawing/2014/main" id="{C8B85638-5764-4C41-A006-85A7435206B5}"/>
               </a:ext>
             </a:extLst>
           </p:cNvPr>
@@ -4822,7 +4822,7 @@
           <p:cNvPr id="11" name="">
             <a:extLst xmlns:a="http://schemas.openxmlformats.org/drawingml/2006/main">
               <a:ext uri="{FF2B5EF4-FFF2-40B4-BE49-F238E27FC236}">
-                <a16:creationId xmlns:a16="http://schemas.microsoft.com/office/drawing/2014/main" id="{B8A8C95A-B28E-456F-B390-5CE5F2E9FF5C}"/>
+                <a16:creationId xmlns:a16="http://schemas.microsoft.com/office/drawing/2014/main" id="{00180B26-0A38-4D8E-BB42-0E2CAB2C5325}"/>
               </a:ext>
             </a:extLst>
           </p:cNvPr>
@@ -4854,7 +4854,7 @@
           <p:cNvPr id="12" name="">
             <a:extLst xmlns:a="http://schemas.openxmlformats.org/drawingml/2006/main">
               <a:ext uri="{FF2B5EF4-FFF2-40B4-BE49-F238E27FC236}">
-                <a16:creationId xmlns:a16="http://schemas.microsoft.com/office/drawing/2014/main" id="{5A961D08-F75D-4A15-A633-BE5DD6D3E753}"/>
+                <a16:creationId xmlns:a16="http://schemas.microsoft.com/office/drawing/2014/main" id="{F3A9A7C6-1001-409D-9335-3BF828A2B591}"/>
               </a:ext>
             </a:extLst>
           </p:cNvPr>
@@ -4911,7 +4911,7 @@
           <p:cNvPr id="13" name="">
             <a:extLst xmlns:a="http://schemas.openxmlformats.org/drawingml/2006/main">
               <a:ext uri="{FF2B5EF4-FFF2-40B4-BE49-F238E27FC236}">
-                <a16:creationId xmlns:a16="http://schemas.microsoft.com/office/drawing/2014/main" id="{F599522D-9447-45ED-9122-184D453D47C9}"/>
+                <a16:creationId xmlns:a16="http://schemas.microsoft.com/office/drawing/2014/main" id="{2DD5B268-CD5C-4AE4-8B40-D6F56BD6FA06}"/>
               </a:ext>
             </a:extLst>
           </p:cNvPr>
@@ -4968,7 +4968,7 @@
           <p:cNvPr id="14" name="">
             <a:extLst xmlns:a="http://schemas.openxmlformats.org/drawingml/2006/main">
               <a:ext uri="{FF2B5EF4-FFF2-40B4-BE49-F238E27FC236}">
-                <a16:creationId xmlns:a16="http://schemas.microsoft.com/office/drawing/2014/main" id="{AA4B8C05-3EA7-4E99-A5A1-F19DF110C01C}"/>
+                <a16:creationId xmlns:a16="http://schemas.microsoft.com/office/drawing/2014/main" id="{1AB5A5CA-7982-4708-AD12-1635CBEE8BE1}"/>
               </a:ext>
             </a:extLst>
           </p:cNvPr>
@@ -5002,7 +5002,7 @@
           <p:cNvPr id="15" name="">
             <a:extLst xmlns:a="http://schemas.openxmlformats.org/drawingml/2006/main">
               <a:ext uri="{FF2B5EF4-FFF2-40B4-BE49-F238E27FC236}">
-                <a16:creationId xmlns:a16="http://schemas.microsoft.com/office/drawing/2014/main" id="{57C9F42E-3E7A-42A4-A9DC-479647553D6B}"/>
+                <a16:creationId xmlns:a16="http://schemas.microsoft.com/office/drawing/2014/main" id="{6A02CA7E-7DEE-4824-B3EF-66EE99AF1C09}"/>
               </a:ext>
             </a:extLst>
           </p:cNvPr>
@@ -5034,7 +5034,7 @@
           <p:cNvPr id="16" name="">
             <a:extLst xmlns:a="http://schemas.openxmlformats.org/drawingml/2006/main">
               <a:ext uri="{FF2B5EF4-FFF2-40B4-BE49-F238E27FC236}">
-                <a16:creationId xmlns:a16="http://schemas.microsoft.com/office/drawing/2014/main" id="{B61DA28A-3F52-47DB-8CE4-6FDEBF7F1C7B}"/>
+                <a16:creationId xmlns:a16="http://schemas.microsoft.com/office/drawing/2014/main" id="{EF5A2A7F-0BAE-4473-ABBA-F51E6D092C30}"/>
               </a:ext>
             </a:extLst>
           </p:cNvPr>
@@ -5091,7 +5091,7 @@
           <p:cNvPr id="17" name="">
             <a:extLst xmlns:a="http://schemas.openxmlformats.org/drawingml/2006/main">
               <a:ext uri="{FF2B5EF4-FFF2-40B4-BE49-F238E27FC236}">
-                <a16:creationId xmlns:a16="http://schemas.microsoft.com/office/drawing/2014/main" id="{B26B4C76-89E9-4CDE-A539-3009B2035FB4}"/>
+                <a16:creationId xmlns:a16="http://schemas.microsoft.com/office/drawing/2014/main" id="{7402FB84-913F-493D-830A-AD471C12E633}"/>
               </a:ext>
             </a:extLst>
           </p:cNvPr>
@@ -5148,7 +5148,7 @@
           <p:cNvPr id="18" name="">
             <a:extLst xmlns:a="http://schemas.openxmlformats.org/drawingml/2006/main">
               <a:ext uri="{FF2B5EF4-FFF2-40B4-BE49-F238E27FC236}">
-                <a16:creationId xmlns:a16="http://schemas.microsoft.com/office/drawing/2014/main" id="{16BC86EA-AAAC-45F3-B3E4-B11AD96DFB95}"/>
+                <a16:creationId xmlns:a16="http://schemas.microsoft.com/office/drawing/2014/main" id="{5B8686F0-504D-4799-8715-3122957CB05C}"/>
               </a:ext>
             </a:extLst>
           </p:cNvPr>
@@ -5182,7 +5182,7 @@
           <p:cNvPr id="19" name="">
             <a:extLst xmlns:a="http://schemas.openxmlformats.org/drawingml/2006/main">
               <a:ext uri="{FF2B5EF4-FFF2-40B4-BE49-F238E27FC236}">
-                <a16:creationId xmlns:a16="http://schemas.microsoft.com/office/drawing/2014/main" id="{849076F7-D4EA-4763-879A-F79F463878C0}"/>
+                <a16:creationId xmlns:a16="http://schemas.microsoft.com/office/drawing/2014/main" id="{FC43BC92-4753-4149-9793-7228F5A8866C}"/>
               </a:ext>
             </a:extLst>
           </p:cNvPr>
@@ -5214,7 +5214,7 @@
           <p:cNvPr id="20" name="">
             <a:extLst xmlns:a="http://schemas.openxmlformats.org/drawingml/2006/main">
               <a:ext uri="{FF2B5EF4-FFF2-40B4-BE49-F238E27FC236}">
-                <a16:creationId xmlns:a16="http://schemas.microsoft.com/office/drawing/2014/main" id="{133AAF3B-B474-448E-B5B2-6CEA3607BE29}"/>
+                <a16:creationId xmlns:a16="http://schemas.microsoft.com/office/drawing/2014/main" id="{B307006E-9320-4E6F-BC75-9F0C206F04CE}"/>
               </a:ext>
             </a:extLst>
           </p:cNvPr>
@@ -5271,7 +5271,7 @@
           <p:cNvPr id="21" name="">
             <a:extLst xmlns:a="http://schemas.openxmlformats.org/drawingml/2006/main">
               <a:ext uri="{FF2B5EF4-FFF2-40B4-BE49-F238E27FC236}">
-                <a16:creationId xmlns:a16="http://schemas.microsoft.com/office/drawing/2014/main" id="{CD6A15B5-3AAC-4C88-83EE-C82E0D6F7475}"/>
+                <a16:creationId xmlns:a16="http://schemas.microsoft.com/office/drawing/2014/main" id="{0FCD2B5D-8DD6-4EC2-BF2F-FF149AE4F241}"/>
               </a:ext>
             </a:extLst>
           </p:cNvPr>
@@ -5328,7 +5328,7 @@
           <p:cNvPr id="22" name="">
             <a:extLst xmlns:a="http://schemas.openxmlformats.org/drawingml/2006/main">
               <a:ext uri="{FF2B5EF4-FFF2-40B4-BE49-F238E27FC236}">
-                <a16:creationId xmlns:a16="http://schemas.microsoft.com/office/drawing/2014/main" id="{6B1CD590-56D0-4A63-B11E-8947BED9D504}"/>
+                <a16:creationId xmlns:a16="http://schemas.microsoft.com/office/drawing/2014/main" id="{98B37A80-0B92-4744-84D8-84FAE008A21A}"/>
               </a:ext>
             </a:extLst>
           </p:cNvPr>
@@ -5383,7 +5383,7 @@
     </p:spTree>
     <p:extLst>
       <p:ext uri="{BB962C8B-B14F-4D97-AF65-F5344CB8AC3E}">
-        <p14:creationId xmlns:p14="http://schemas.microsoft.com/office/powerpoint/2010/main" val="2130868814"/>
+        <p14:creationId xmlns:p14="http://schemas.microsoft.com/office/powerpoint/2010/main" val="1254305287"/>
       </p:ext>
     </p:extLst>
   </p:cSld>
@@ -5584,7 +5584,7 @@
           <p:cNvPr id="23" name="">
             <a:extLst xmlns:a="http://schemas.openxmlformats.org/drawingml/2006/main">
               <a:ext uri="{FF2B5EF4-FFF2-40B4-BE49-F238E27FC236}">
-                <a16:creationId xmlns:a16="http://schemas.microsoft.com/office/drawing/2014/main" id="{16F106E5-EF36-49AF-90B1-6E927646B44E}"/>
+                <a16:creationId xmlns:a16="http://schemas.microsoft.com/office/drawing/2014/main" id="{75C9B7A8-B013-4168-A7C3-23FA2DB7885D}"/>
               </a:ext>
             </a:extLst>
           </p:cNvPr>
@@ -5616,7 +5616,7 @@
           <p:cNvPr id="2" name="">
             <a:extLst xmlns:a="http://schemas.openxmlformats.org/drawingml/2006/main">
               <a:ext uri="{FF2B5EF4-FFF2-40B4-BE49-F238E27FC236}">
-                <a16:creationId xmlns:a16="http://schemas.microsoft.com/office/drawing/2014/main" id="{86E565C6-9340-4756-B8D1-14E316AA5727}"/>
+                <a16:creationId xmlns:a16="http://schemas.microsoft.com/office/drawing/2014/main" id="{8FF6FB0A-9343-4957-9ADD-5C8F72D916F2}"/>
               </a:ext>
             </a:extLst>
           </p:cNvPr>
@@ -5673,7 +5673,7 @@
           <p:cNvPr id="3" name="">
             <a:extLst xmlns:a="http://schemas.openxmlformats.org/drawingml/2006/main">
               <a:ext uri="{FF2B5EF4-FFF2-40B4-BE49-F238E27FC236}">
-                <a16:creationId xmlns:a16="http://schemas.microsoft.com/office/drawing/2014/main" id="{AF39ACBC-0ED7-4FE2-B0CD-A1FCD9DFBA05}"/>
+                <a16:creationId xmlns:a16="http://schemas.microsoft.com/office/drawing/2014/main" id="{E270EF8E-6D20-48FF-A5FC-1DAD319060F1}"/>
               </a:ext>
             </a:extLst>
           </p:cNvPr>
@@ -5705,7 +5705,7 @@
           <p:cNvPr id="4" name="">
             <a:extLst xmlns:a="http://schemas.openxmlformats.org/drawingml/2006/main">
               <a:ext uri="{FF2B5EF4-FFF2-40B4-BE49-F238E27FC236}">
-                <a16:creationId xmlns:a16="http://schemas.microsoft.com/office/drawing/2014/main" id="{822FFECE-8871-4A63-ADC9-2F8F6AB1F2F3}"/>
+                <a16:creationId xmlns:a16="http://schemas.microsoft.com/office/drawing/2014/main" id="{EAB56059-F74A-4E1A-9A43-C71A838B2A10}"/>
               </a:ext>
             </a:extLst>
           </p:cNvPr>
@@ -5762,7 +5762,7 @@
           <p:cNvPr id="5" name="">
             <a:extLst xmlns:a="http://schemas.openxmlformats.org/drawingml/2006/main">
               <a:ext uri="{FF2B5EF4-FFF2-40B4-BE49-F238E27FC236}">
-                <a16:creationId xmlns:a16="http://schemas.microsoft.com/office/drawing/2014/main" id="{2E0C867E-CD32-47D5-AD50-9A1E60430898}"/>
+                <a16:creationId xmlns:a16="http://schemas.microsoft.com/office/drawing/2014/main" id="{9ED199CC-2A66-47FB-BD47-38EBC05FCDE1}"/>
               </a:ext>
             </a:extLst>
           </p:cNvPr>
@@ -5819,7 +5819,7 @@
           <p:cNvPr id="6" name="">
             <a:extLst xmlns:a="http://schemas.openxmlformats.org/drawingml/2006/main">
               <a:ext uri="{FF2B5EF4-FFF2-40B4-BE49-F238E27FC236}">
-                <a16:creationId xmlns:a16="http://schemas.microsoft.com/office/drawing/2014/main" id="{E3502A00-C547-4481-A03D-43F2ECC5BF53}"/>
+                <a16:creationId xmlns:a16="http://schemas.microsoft.com/office/drawing/2014/main" id="{3482A205-006B-47C2-B00A-6A49633A720B}"/>
               </a:ext>
             </a:extLst>
           </p:cNvPr>
@@ -5876,7 +5876,7 @@
           <p:cNvPr id="7" name="">
             <a:extLst xmlns:a="http://schemas.openxmlformats.org/drawingml/2006/main">
               <a:ext uri="{FF2B5EF4-FFF2-40B4-BE49-F238E27FC236}">
-                <a16:creationId xmlns:a16="http://schemas.microsoft.com/office/drawing/2014/main" id="{4DD9ACF4-FAFB-464C-97B8-CF9222CFC06C}"/>
+                <a16:creationId xmlns:a16="http://schemas.microsoft.com/office/drawing/2014/main" id="{0B00D23F-D268-4606-896A-DC0C35B1CB48}"/>
               </a:ext>
             </a:extLst>
           </p:cNvPr>
@@ -5908,7 +5908,7 @@
           <p:cNvPr id="8" name="">
             <a:extLst xmlns:a="http://schemas.openxmlformats.org/drawingml/2006/main">
               <a:ext uri="{FF2B5EF4-FFF2-40B4-BE49-F238E27FC236}">
-                <a16:creationId xmlns:a16="http://schemas.microsoft.com/office/drawing/2014/main" id="{2FF31E12-D0ED-49F4-A213-CDCE73AF8B44}"/>
+                <a16:creationId xmlns:a16="http://schemas.microsoft.com/office/drawing/2014/main" id="{43D32A5C-1AF5-49DE-8B82-B05D3AD23FE8}"/>
               </a:ext>
             </a:extLst>
           </p:cNvPr>
@@ -5965,7 +5965,7 @@
           <p:cNvPr id="9" name="">
             <a:extLst xmlns:a="http://schemas.openxmlformats.org/drawingml/2006/main">
               <a:ext uri="{FF2B5EF4-FFF2-40B4-BE49-F238E27FC236}">
-                <a16:creationId xmlns:a16="http://schemas.microsoft.com/office/drawing/2014/main" id="{D19483E3-A6DB-445B-946F-204B0A404A75}"/>
+                <a16:creationId xmlns:a16="http://schemas.microsoft.com/office/drawing/2014/main" id="{BAED0B72-B0B4-4735-81E1-D03606711F38}"/>
               </a:ext>
             </a:extLst>
           </p:cNvPr>
@@ -6022,7 +6022,7 @@
           <p:cNvPr id="10" name="">
             <a:extLst xmlns:a="http://schemas.openxmlformats.org/drawingml/2006/main">
               <a:ext uri="{FF2B5EF4-FFF2-40B4-BE49-F238E27FC236}">
-                <a16:creationId xmlns:a16="http://schemas.microsoft.com/office/drawing/2014/main" id="{FAC2D31B-99A4-4AB2-8F36-97581A9AFF34}"/>
+                <a16:creationId xmlns:a16="http://schemas.microsoft.com/office/drawing/2014/main" id="{C8D583C3-D045-4963-8F6D-497C11BDD5C7}"/>
               </a:ext>
             </a:extLst>
           </p:cNvPr>
@@ -6056,7 +6056,7 @@
           <p:cNvPr id="11" name="">
             <a:extLst xmlns:a="http://schemas.openxmlformats.org/drawingml/2006/main">
               <a:ext uri="{FF2B5EF4-FFF2-40B4-BE49-F238E27FC236}">
-                <a16:creationId xmlns:a16="http://schemas.microsoft.com/office/drawing/2014/main" id="{83AD35D0-2608-4238-B67B-AB433A4D6735}"/>
+                <a16:creationId xmlns:a16="http://schemas.microsoft.com/office/drawing/2014/main" id="{069872A1-4368-4770-ABBF-D80B60F05686}"/>
               </a:ext>
             </a:extLst>
           </p:cNvPr>
@@ -6088,7 +6088,7 @@
           <p:cNvPr id="12" name="">
             <a:extLst xmlns:a="http://schemas.openxmlformats.org/drawingml/2006/main">
               <a:ext uri="{FF2B5EF4-FFF2-40B4-BE49-F238E27FC236}">
-                <a16:creationId xmlns:a16="http://schemas.microsoft.com/office/drawing/2014/main" id="{E63FEC57-C622-47E6-8C5B-9A57CC747566}"/>
+                <a16:creationId xmlns:a16="http://schemas.microsoft.com/office/drawing/2014/main" id="{A8030CFC-2828-4D97-8BCA-49E9C4206DAF}"/>
               </a:ext>
             </a:extLst>
           </p:cNvPr>
@@ -6145,7 +6145,7 @@
           <p:cNvPr id="13" name="">
             <a:extLst xmlns:a="http://schemas.openxmlformats.org/drawingml/2006/main">
               <a:ext uri="{FF2B5EF4-FFF2-40B4-BE49-F238E27FC236}">
-                <a16:creationId xmlns:a16="http://schemas.microsoft.com/office/drawing/2014/main" id="{9E00219E-1252-4219-B412-21DE7A70A8FD}"/>
+                <a16:creationId xmlns:a16="http://schemas.microsoft.com/office/drawing/2014/main" id="{10152B8D-9D81-45D9-B4EF-C8577BB9B7B3}"/>
               </a:ext>
             </a:extLst>
           </p:cNvPr>
@@ -6202,7 +6202,7 @@
           <p:cNvPr id="14" name="">
             <a:extLst xmlns:a="http://schemas.openxmlformats.org/drawingml/2006/main">
               <a:ext uri="{FF2B5EF4-FFF2-40B4-BE49-F238E27FC236}">
-                <a16:creationId xmlns:a16="http://schemas.microsoft.com/office/drawing/2014/main" id="{BC67D6CD-2EB2-4B92-9000-F12A17494609}"/>
+                <a16:creationId xmlns:a16="http://schemas.microsoft.com/office/drawing/2014/main" id="{4A65DD7A-138C-406E-A3F0-3CB8B817FE08}"/>
               </a:ext>
             </a:extLst>
           </p:cNvPr>
@@ -6236,7 +6236,7 @@
           <p:cNvPr id="15" name="">
             <a:extLst xmlns:a="http://schemas.openxmlformats.org/drawingml/2006/main">
               <a:ext uri="{FF2B5EF4-FFF2-40B4-BE49-F238E27FC236}">
-                <a16:creationId xmlns:a16="http://schemas.microsoft.com/office/drawing/2014/main" id="{60696CE4-11FA-4169-8505-08E560880191}"/>
+                <a16:creationId xmlns:a16="http://schemas.microsoft.com/office/drawing/2014/main" id="{56C02776-63DD-48A7-B1F1-3513369186FE}"/>
               </a:ext>
             </a:extLst>
           </p:cNvPr>
@@ -6268,7 +6268,7 @@
           <p:cNvPr id="16" name="">
             <a:extLst xmlns:a="http://schemas.openxmlformats.org/drawingml/2006/main">
               <a:ext uri="{FF2B5EF4-FFF2-40B4-BE49-F238E27FC236}">
-                <a16:creationId xmlns:a16="http://schemas.microsoft.com/office/drawing/2014/main" id="{DCC25645-1657-400F-AC6C-7D1FF0C735EE}"/>
+                <a16:creationId xmlns:a16="http://schemas.microsoft.com/office/drawing/2014/main" id="{7CE1980A-EE3D-4C39-A7A6-BFC08C0D8418}"/>
               </a:ext>
             </a:extLst>
           </p:cNvPr>
@@ -6325,7 +6325,7 @@
           <p:cNvPr id="17" name="">
             <a:extLst xmlns:a="http://schemas.openxmlformats.org/drawingml/2006/main">
               <a:ext uri="{FF2B5EF4-FFF2-40B4-BE49-F238E27FC236}">
-                <a16:creationId xmlns:a16="http://schemas.microsoft.com/office/drawing/2014/main" id="{4A28D250-54E0-4891-A652-4CB1B0AFD10E}"/>
+                <a16:creationId xmlns:a16="http://schemas.microsoft.com/office/drawing/2014/main" id="{A4E78C2B-3367-4AC1-B330-B6D3214946C0}"/>
               </a:ext>
             </a:extLst>
           </p:cNvPr>
@@ -6382,7 +6382,7 @@
           <p:cNvPr id="18" name="">
             <a:extLst xmlns:a="http://schemas.openxmlformats.org/drawingml/2006/main">
               <a:ext uri="{FF2B5EF4-FFF2-40B4-BE49-F238E27FC236}">
-                <a16:creationId xmlns:a16="http://schemas.microsoft.com/office/drawing/2014/main" id="{A97B99AC-376B-4208-AF60-9FA757193FAF}"/>
+                <a16:creationId xmlns:a16="http://schemas.microsoft.com/office/drawing/2014/main" id="{4219D89C-09ED-430A-9D84-B16D2FE14F1C}"/>
               </a:ext>
             </a:extLst>
           </p:cNvPr>
@@ -6416,7 +6416,7 @@
           <p:cNvPr id="19" name="">
             <a:extLst xmlns:a="http://schemas.openxmlformats.org/drawingml/2006/main">
               <a:ext uri="{FF2B5EF4-FFF2-40B4-BE49-F238E27FC236}">
-                <a16:creationId xmlns:a16="http://schemas.microsoft.com/office/drawing/2014/main" id="{34D6590B-7FC2-4605-84B2-5EFED23DF32B}"/>
+                <a16:creationId xmlns:a16="http://schemas.microsoft.com/office/drawing/2014/main" id="{4B008C02-6F74-429C-9364-D3DED23B6076}"/>
               </a:ext>
             </a:extLst>
           </p:cNvPr>
@@ -6448,7 +6448,7 @@
           <p:cNvPr id="20" name="">
             <a:extLst xmlns:a="http://schemas.openxmlformats.org/drawingml/2006/main">
               <a:ext uri="{FF2B5EF4-FFF2-40B4-BE49-F238E27FC236}">
-                <a16:creationId xmlns:a16="http://schemas.microsoft.com/office/drawing/2014/main" id="{0E196988-84D3-448C-B347-15BE4BB55461}"/>
+                <a16:creationId xmlns:a16="http://schemas.microsoft.com/office/drawing/2014/main" id="{E8276C28-F63A-4410-8902-7C3F8FAE2B5F}"/>
               </a:ext>
             </a:extLst>
           </p:cNvPr>
@@ -6505,7 +6505,7 @@
           <p:cNvPr id="21" name="">
             <a:extLst xmlns:a="http://schemas.openxmlformats.org/drawingml/2006/main">
               <a:ext uri="{FF2B5EF4-FFF2-40B4-BE49-F238E27FC236}">
-                <a16:creationId xmlns:a16="http://schemas.microsoft.com/office/drawing/2014/main" id="{CB56E7DE-4D41-4578-A8E0-2826CC6FE189}"/>
+                <a16:creationId xmlns:a16="http://schemas.microsoft.com/office/drawing/2014/main" id="{B75E554F-08CB-4C8C-9FC4-D04ED78A74DA}"/>
               </a:ext>
             </a:extLst>
           </p:cNvPr>
@@ -6562,7 +6562,7 @@
           <p:cNvPr id="22" name="">
             <a:extLst xmlns:a="http://schemas.openxmlformats.org/drawingml/2006/main">
               <a:ext uri="{FF2B5EF4-FFF2-40B4-BE49-F238E27FC236}">
-                <a16:creationId xmlns:a16="http://schemas.microsoft.com/office/drawing/2014/main" id="{5AE45465-D8EA-4C6C-9631-7F69CF3164DE}"/>
+                <a16:creationId xmlns:a16="http://schemas.microsoft.com/office/drawing/2014/main" id="{6A6632CC-7375-4D29-84B8-3733302ED3CC}"/>
               </a:ext>
             </a:extLst>
           </p:cNvPr>
@@ -6617,7 +6617,7 @@
     </p:spTree>
     <p:extLst>
       <p:ext uri="{BB962C8B-B14F-4D97-AF65-F5344CB8AC3E}">
-        <p14:creationId xmlns:p14="http://schemas.microsoft.com/office/powerpoint/2010/main" val="752042301"/>
+        <p14:creationId xmlns:p14="http://schemas.microsoft.com/office/powerpoint/2010/main" val="1072282881"/>
       </p:ext>
     </p:extLst>
   </p:cSld>
@@ -6818,7 +6818,7 @@
           <p:cNvPr id="16" name="">
             <a:extLst xmlns:a="http://schemas.openxmlformats.org/drawingml/2006/main">
               <a:ext uri="{FF2B5EF4-FFF2-40B4-BE49-F238E27FC236}">
-                <a16:creationId xmlns:a16="http://schemas.microsoft.com/office/drawing/2014/main" id="{EFB48121-C5BC-4ADF-B3B6-65E0689ACF22}"/>
+                <a16:creationId xmlns:a16="http://schemas.microsoft.com/office/drawing/2014/main" id="{C36AA9A2-64F2-42F7-8E87-C2ACC3AC66EB}"/>
               </a:ext>
             </a:extLst>
           </p:cNvPr>
@@ -6850,7 +6850,7 @@
           <p:cNvPr id="2" name="">
             <a:extLst xmlns:a="http://schemas.openxmlformats.org/drawingml/2006/main">
               <a:ext uri="{FF2B5EF4-FFF2-40B4-BE49-F238E27FC236}">
-                <a16:creationId xmlns:a16="http://schemas.microsoft.com/office/drawing/2014/main" id="{6D36E251-6435-424E-AEFE-E55A361D2ED4}"/>
+                <a16:creationId xmlns:a16="http://schemas.microsoft.com/office/drawing/2014/main" id="{11D4AFD0-2D5B-43CF-9487-54A047BDECDD}"/>
               </a:ext>
             </a:extLst>
           </p:cNvPr>
@@ -6907,7 +6907,7 @@
           <p:cNvPr id="3" name="">
             <a:extLst xmlns:a="http://schemas.openxmlformats.org/drawingml/2006/main">
               <a:ext uri="{FF2B5EF4-FFF2-40B4-BE49-F238E27FC236}">
-                <a16:creationId xmlns:a16="http://schemas.microsoft.com/office/drawing/2014/main" id="{47D9C25E-F859-417A-B04A-AA22D2AB450E}"/>
+                <a16:creationId xmlns:a16="http://schemas.microsoft.com/office/drawing/2014/main" id="{703CEF91-32E0-4823-A03E-D91CBDE00015}"/>
               </a:ext>
             </a:extLst>
           </p:cNvPr>
@@ -6939,7 +6939,7 @@
           <p:cNvPr id="4" name="">
             <a:extLst xmlns:a="http://schemas.openxmlformats.org/drawingml/2006/main">
               <a:ext uri="{FF2B5EF4-FFF2-40B4-BE49-F238E27FC236}">
-                <a16:creationId xmlns:a16="http://schemas.microsoft.com/office/drawing/2014/main" id="{46A8F25E-C3E4-43B9-8298-5AF44DC05D48}"/>
+                <a16:creationId xmlns:a16="http://schemas.microsoft.com/office/drawing/2014/main" id="{9AA6DA4E-CC2D-49CD-B1A8-AE095D8175C5}"/>
               </a:ext>
             </a:extLst>
           </p:cNvPr>
@@ -6996,7 +6996,7 @@
           <p:cNvPr id="5" name="">
             <a:extLst xmlns:a="http://schemas.openxmlformats.org/drawingml/2006/main">
               <a:ext uri="{FF2B5EF4-FFF2-40B4-BE49-F238E27FC236}">
-                <a16:creationId xmlns:a16="http://schemas.microsoft.com/office/drawing/2014/main" id="{7D113633-1094-492F-BB74-FBA777A516DF}"/>
+                <a16:creationId xmlns:a16="http://schemas.microsoft.com/office/drawing/2014/main" id="{EE08BCBD-3A31-4133-B783-09842CD6D034}"/>
               </a:ext>
             </a:extLst>
           </p:cNvPr>
@@ -7053,7 +7053,7 @@
           <p:cNvPr id="6" name="">
             <a:extLst xmlns:a="http://schemas.openxmlformats.org/drawingml/2006/main">
               <a:ext uri="{FF2B5EF4-FFF2-40B4-BE49-F238E27FC236}">
-                <a16:creationId xmlns:a16="http://schemas.microsoft.com/office/drawing/2014/main" id="{2CDC62BC-D953-41DD-AE75-DC7B2724FFBC}"/>
+                <a16:creationId xmlns:a16="http://schemas.microsoft.com/office/drawing/2014/main" id="{21442DA5-D622-49A7-AA01-035EAB77CF29}"/>
               </a:ext>
             </a:extLst>
           </p:cNvPr>
@@ -7110,7 +7110,7 @@
           <p:cNvPr id="7" name="">
             <a:extLst xmlns:a="http://schemas.openxmlformats.org/drawingml/2006/main">
               <a:ext uri="{FF2B5EF4-FFF2-40B4-BE49-F238E27FC236}">
-                <a16:creationId xmlns:a16="http://schemas.microsoft.com/office/drawing/2014/main" id="{0BF08646-D8CB-43F4-B046-1AFAE79CFE77}"/>
+                <a16:creationId xmlns:a16="http://schemas.microsoft.com/office/drawing/2014/main" id="{5C50D0AF-9AAD-437F-938B-75F3F7B0AD44}"/>
               </a:ext>
             </a:extLst>
           </p:cNvPr>
@@ -7142,7 +7142,7 @@
           <p:cNvPr id="8" name="">
             <a:extLst xmlns:a="http://schemas.openxmlformats.org/drawingml/2006/main">
               <a:ext uri="{FF2B5EF4-FFF2-40B4-BE49-F238E27FC236}">
-                <a16:creationId xmlns:a16="http://schemas.microsoft.com/office/drawing/2014/main" id="{C8A1F515-58AD-45D8-9779-84389E089365}"/>
+                <a16:creationId xmlns:a16="http://schemas.microsoft.com/office/drawing/2014/main" id="{B49AEC4A-9306-4034-9856-3043D8365C2D}"/>
               </a:ext>
             </a:extLst>
           </p:cNvPr>
@@ -7199,7 +7199,7 @@
           <p:cNvPr id="9" name="">
             <a:extLst xmlns:a="http://schemas.openxmlformats.org/drawingml/2006/main">
               <a:ext uri="{FF2B5EF4-FFF2-40B4-BE49-F238E27FC236}">
-                <a16:creationId xmlns:a16="http://schemas.microsoft.com/office/drawing/2014/main" id="{5AE360F0-B2F5-4972-8D6D-7015DDA2632C}"/>
+                <a16:creationId xmlns:a16="http://schemas.microsoft.com/office/drawing/2014/main" id="{5DD3DAAA-92C8-4456-AD8D-E156B001FE5F}"/>
               </a:ext>
             </a:extLst>
           </p:cNvPr>
@@ -7256,7 +7256,7 @@
           <p:cNvPr id="10" name="">
             <a:extLst xmlns:a="http://schemas.openxmlformats.org/drawingml/2006/main">
               <a:ext uri="{FF2B5EF4-FFF2-40B4-BE49-F238E27FC236}">
-                <a16:creationId xmlns:a16="http://schemas.microsoft.com/office/drawing/2014/main" id="{19B2620A-06D2-4C3C-B2C6-1144FD6FA3EB}"/>
+                <a16:creationId xmlns:a16="http://schemas.microsoft.com/office/drawing/2014/main" id="{9569A0BE-DEFA-49ED-8066-643D879294D6}"/>
               </a:ext>
             </a:extLst>
           </p:cNvPr>
@@ -7313,7 +7313,7 @@
           <p:cNvPr id="11" name="">
             <a:extLst xmlns:a="http://schemas.openxmlformats.org/drawingml/2006/main">
               <a:ext uri="{FF2B5EF4-FFF2-40B4-BE49-F238E27FC236}">
-                <a16:creationId xmlns:a16="http://schemas.microsoft.com/office/drawing/2014/main" id="{ABA23986-470A-4C62-A90A-EB1C68E9B7F9}"/>
+                <a16:creationId xmlns:a16="http://schemas.microsoft.com/office/drawing/2014/main" id="{1A9B19A3-4825-41DF-B940-378BB1F971F2}"/>
               </a:ext>
             </a:extLst>
           </p:cNvPr>
@@ -7345,7 +7345,7 @@
           <p:cNvPr id="12" name="">
             <a:extLst xmlns:a="http://schemas.openxmlformats.org/drawingml/2006/main">
               <a:ext uri="{FF2B5EF4-FFF2-40B4-BE49-F238E27FC236}">
-                <a16:creationId xmlns:a16="http://schemas.microsoft.com/office/drawing/2014/main" id="{C6875775-71DC-46F1-BB9B-FEB82D0A3B3C}"/>
+                <a16:creationId xmlns:a16="http://schemas.microsoft.com/office/drawing/2014/main" id="{9618CD46-2779-4631-B05D-26D9F4747306}"/>
               </a:ext>
             </a:extLst>
           </p:cNvPr>
@@ -7402,7 +7402,7 @@
           <p:cNvPr id="13" name="">
             <a:extLst xmlns:a="http://schemas.openxmlformats.org/drawingml/2006/main">
               <a:ext uri="{FF2B5EF4-FFF2-40B4-BE49-F238E27FC236}">
-                <a16:creationId xmlns:a16="http://schemas.microsoft.com/office/drawing/2014/main" id="{04BDC871-35E0-4501-8101-6C1FDB8E6B7A}"/>
+                <a16:creationId xmlns:a16="http://schemas.microsoft.com/office/drawing/2014/main" id="{554D7915-93DC-481E-8A88-DE4162892A1A}"/>
               </a:ext>
             </a:extLst>
           </p:cNvPr>
@@ -7459,7 +7459,7 @@
           <p:cNvPr id="14" name="">
             <a:extLst xmlns:a="http://schemas.openxmlformats.org/drawingml/2006/main">
               <a:ext uri="{FF2B5EF4-FFF2-40B4-BE49-F238E27FC236}">
-                <a16:creationId xmlns:a16="http://schemas.microsoft.com/office/drawing/2014/main" id="{F270A4E9-3D44-4881-9A34-1A62CD4032F8}"/>
+                <a16:creationId xmlns:a16="http://schemas.microsoft.com/office/drawing/2014/main" id="{EC0171D0-6269-4B0E-B5F2-04E1892CC953}"/>
               </a:ext>
             </a:extLst>
           </p:cNvPr>
@@ -7516,7 +7516,7 @@
           <p:cNvPr id="15" name="">
             <a:extLst xmlns:a="http://schemas.openxmlformats.org/drawingml/2006/main">
               <a:ext uri="{FF2B5EF4-FFF2-40B4-BE49-F238E27FC236}">
-                <a16:creationId xmlns:a16="http://schemas.microsoft.com/office/drawing/2014/main" id="{29ADE37A-79C3-4305-88EB-EC9BF1F5B3CF}"/>
+                <a16:creationId xmlns:a16="http://schemas.microsoft.com/office/drawing/2014/main" id="{EFB59D7E-FFDC-485D-951B-EE279C2AD392}"/>
               </a:ext>
             </a:extLst>
           </p:cNvPr>
@@ -7571,7 +7571,7 @@
     </p:spTree>
     <p:extLst>
       <p:ext uri="{BB962C8B-B14F-4D97-AF65-F5344CB8AC3E}">
-        <p14:creationId xmlns:p14="http://schemas.microsoft.com/office/powerpoint/2010/main" val="148165189"/>
+        <p14:creationId xmlns:p14="http://schemas.microsoft.com/office/powerpoint/2010/main" val="559713341"/>
       </p:ext>
     </p:extLst>
   </p:cSld>
@@ -7772,7 +7772,7 @@
           <p:cNvPr id="23" name="">
             <a:extLst xmlns:a="http://schemas.openxmlformats.org/drawingml/2006/main">
               <a:ext uri="{FF2B5EF4-FFF2-40B4-BE49-F238E27FC236}">
-                <a16:creationId xmlns:a16="http://schemas.microsoft.com/office/drawing/2014/main" id="{10E97EAD-6234-4322-9FB9-9E8F4664A523}"/>
+                <a16:creationId xmlns:a16="http://schemas.microsoft.com/office/drawing/2014/main" id="{8A284B0C-73A2-4A26-ACB3-B86A091C75F4}"/>
               </a:ext>
             </a:extLst>
           </p:cNvPr>
@@ -7804,7 +7804,7 @@
           <p:cNvPr id="2" name="">
             <a:extLst xmlns:a="http://schemas.openxmlformats.org/drawingml/2006/main">
               <a:ext uri="{FF2B5EF4-FFF2-40B4-BE49-F238E27FC236}">
-                <a16:creationId xmlns:a16="http://schemas.microsoft.com/office/drawing/2014/main" id="{3E4FC45F-FF63-4323-B6E4-E69F6E6904BF}"/>
+                <a16:creationId xmlns:a16="http://schemas.microsoft.com/office/drawing/2014/main" id="{FE33A792-8D4B-4A7B-8AE2-5D1A565B7E68}"/>
               </a:ext>
             </a:extLst>
           </p:cNvPr>
@@ -7861,7 +7861,7 @@
           <p:cNvPr id="3" name="">
             <a:extLst xmlns:a="http://schemas.openxmlformats.org/drawingml/2006/main">
               <a:ext uri="{FF2B5EF4-FFF2-40B4-BE49-F238E27FC236}">
-                <a16:creationId xmlns:a16="http://schemas.microsoft.com/office/drawing/2014/main" id="{8FD16B56-B46E-4BD3-B5B3-9DAEFF6FB010}"/>
+                <a16:creationId xmlns:a16="http://schemas.microsoft.com/office/drawing/2014/main" id="{BFFBC1DF-8F34-4F83-94BD-8753CCBA765F}"/>
               </a:ext>
             </a:extLst>
           </p:cNvPr>
@@ -7893,7 +7893,7 @@
           <p:cNvPr id="4" name="">
             <a:extLst xmlns:a="http://schemas.openxmlformats.org/drawingml/2006/main">
               <a:ext uri="{FF2B5EF4-FFF2-40B4-BE49-F238E27FC236}">
-                <a16:creationId xmlns:a16="http://schemas.microsoft.com/office/drawing/2014/main" id="{BF89D23C-A7FD-40F7-A2E8-BDFA53474D54}"/>
+                <a16:creationId xmlns:a16="http://schemas.microsoft.com/office/drawing/2014/main" id="{41A47651-CE05-4603-A792-69476E9F71DE}"/>
               </a:ext>
             </a:extLst>
           </p:cNvPr>
@@ -7950,7 +7950,7 @@
           <p:cNvPr id="5" name="">
             <a:extLst xmlns:a="http://schemas.openxmlformats.org/drawingml/2006/main">
               <a:ext uri="{FF2B5EF4-FFF2-40B4-BE49-F238E27FC236}">
-                <a16:creationId xmlns:a16="http://schemas.microsoft.com/office/drawing/2014/main" id="{4F135063-C909-45D4-809F-E3E255C6E55F}"/>
+                <a16:creationId xmlns:a16="http://schemas.microsoft.com/office/drawing/2014/main" id="{9672E025-226A-4FD9-B34F-5322CA01F6AB}"/>
               </a:ext>
             </a:extLst>
           </p:cNvPr>
@@ -8007,7 +8007,7 @@
           <p:cNvPr id="6" name="">
             <a:extLst xmlns:a="http://schemas.openxmlformats.org/drawingml/2006/main">
               <a:ext uri="{FF2B5EF4-FFF2-40B4-BE49-F238E27FC236}">
-                <a16:creationId xmlns:a16="http://schemas.microsoft.com/office/drawing/2014/main" id="{4494E476-CC88-4C14-96F2-6678FFFB337A}"/>
+                <a16:creationId xmlns:a16="http://schemas.microsoft.com/office/drawing/2014/main" id="{F149FAA0-0272-4A5A-BF11-589FF726850C}"/>
               </a:ext>
             </a:extLst>
           </p:cNvPr>
@@ -8064,7 +8064,7 @@
           <p:cNvPr id="7" name="">
             <a:extLst xmlns:a="http://schemas.openxmlformats.org/drawingml/2006/main">
               <a:ext uri="{FF2B5EF4-FFF2-40B4-BE49-F238E27FC236}">
-                <a16:creationId xmlns:a16="http://schemas.microsoft.com/office/drawing/2014/main" id="{35063843-E984-4129-9DA2-78166EB03AD0}"/>
+                <a16:creationId xmlns:a16="http://schemas.microsoft.com/office/drawing/2014/main" id="{C26BA1E6-4214-452A-9E7C-ED9C54EFC07A}"/>
               </a:ext>
             </a:extLst>
           </p:cNvPr>
@@ -8096,7 +8096,7 @@
           <p:cNvPr id="8" name="">
             <a:extLst xmlns:a="http://schemas.openxmlformats.org/drawingml/2006/main">
               <a:ext uri="{FF2B5EF4-FFF2-40B4-BE49-F238E27FC236}">
-                <a16:creationId xmlns:a16="http://schemas.microsoft.com/office/drawing/2014/main" id="{6EF96E8B-CB74-4C2A-B383-DE22A8260E03}"/>
+                <a16:creationId xmlns:a16="http://schemas.microsoft.com/office/drawing/2014/main" id="{3D3F0A24-EDA8-4582-8D20-A43AA5B6A649}"/>
               </a:ext>
             </a:extLst>
           </p:cNvPr>
@@ -8153,7 +8153,7 @@
           <p:cNvPr id="9" name="">
             <a:extLst xmlns:a="http://schemas.openxmlformats.org/drawingml/2006/main">
               <a:ext uri="{FF2B5EF4-FFF2-40B4-BE49-F238E27FC236}">
-                <a16:creationId xmlns:a16="http://schemas.microsoft.com/office/drawing/2014/main" id="{5D4D44F9-5EB5-432C-8B59-ADC78485C92B}"/>
+                <a16:creationId xmlns:a16="http://schemas.microsoft.com/office/drawing/2014/main" id="{20881CCE-FCBA-48E0-B29B-77FC13525179}"/>
               </a:ext>
             </a:extLst>
           </p:cNvPr>
@@ -8210,19 +8210,19 @@
           <p:cNvPr id="10" name="">
             <a:extLst xmlns:a="http://schemas.openxmlformats.org/drawingml/2006/main">
               <a:ext uri="{FF2B5EF4-FFF2-40B4-BE49-F238E27FC236}">
-                <a16:creationId xmlns:a16="http://schemas.microsoft.com/office/drawing/2014/main" id="{B1C6AA0A-A542-4509-A0AC-8CC470B8244A}"/>
-              </a:ext>
-            </a:extLst>
-          </p:cNvPr>
-          <p:cNvSpPr>
-            <a:spLocks xmlns:a="http://schemas.openxmlformats.org/drawingml/2006/main" noGrp="1"/>
-          </p:cNvSpPr>
-          <p:nvPr/>
-        </p:nvSpPr>
-        <p:spPr>
-          <a:xfrm xmlns:a="http://schemas.openxmlformats.org/drawingml/2006/main">
-            <a:off x="914400" y="1257300"/>
-            <a:ext cx="10363200" cy="781050"/>
+                <a16:creationId xmlns:a16="http://schemas.microsoft.com/office/drawing/2014/main" id="{364002DF-BCA4-49B5-83CD-DB5D1E09572C}"/>
+              </a:ext>
+            </a:extLst>
+          </p:cNvPr>
+          <p:cNvSpPr>
+            <a:spLocks xmlns:a="http://schemas.openxmlformats.org/drawingml/2006/main" noGrp="1"/>
+          </p:cNvSpPr>
+          <p:nvPr/>
+        </p:nvSpPr>
+        <p:spPr>
+          <a:xfrm xmlns:a="http://schemas.openxmlformats.org/drawingml/2006/main">
+            <a:off x="857250" y="1219200"/>
+            <a:ext cx="10477500" cy="742950"/>
           </a:xfrm>
           <a:prstGeom xmlns:a="http://schemas.openxmlformats.org/drawingml/2006/main" prst="rect">
             <a:avLst/>
@@ -8239,7 +8239,7 @@
           <a:lstStyle xmlns:a="http://schemas.openxmlformats.org/drawingml/2006/main"/>
           <a:p xmlns:a="http://schemas.openxmlformats.org/drawingml/2006/main">
             <a:pPr algn="ctr">
-              <a:defRPr sz="2175" b="1">
+              <a:defRPr sz="2100" b="1">
                 <a:solidFill>
                   <a:srgbClr val="17253A"/>
                 </a:solidFill>
@@ -8249,7 +8249,7 @@
               </a:defRPr>
             </a:pPr>
             <a:r>
-              <a:rPr sz="2175" b="1">
+              <a:rPr sz="2100" b="1">
                 <a:solidFill>
                   <a:srgbClr val="17253A"/>
                 </a:solidFill>
@@ -8267,28 +8267,30 @@
           <p:cNvPr id="11" name="">
             <a:extLst xmlns:a="http://schemas.openxmlformats.org/drawingml/2006/main">
               <a:ext uri="{FF2B5EF4-FFF2-40B4-BE49-F238E27FC236}">
-                <a16:creationId xmlns:a16="http://schemas.microsoft.com/office/drawing/2014/main" id="{061034B3-E451-48BA-A598-1ED5C5563C55}"/>
-              </a:ext>
-            </a:extLst>
-          </p:cNvPr>
-          <p:cNvSpPr>
-            <a:spLocks xmlns:a="http://schemas.openxmlformats.org/drawingml/2006/main" noGrp="1"/>
-          </p:cNvSpPr>
-          <p:nvPr/>
-        </p:nvSpPr>
-        <p:spPr>
-          <a:xfrm xmlns:a="http://schemas.openxmlformats.org/drawingml/2006/main">
-            <a:off x="1000125" y="2247900"/>
-            <a:ext cx="476250" cy="476250"/>
-          </a:xfrm>
-          <a:prstGeom xmlns:a="http://schemas.openxmlformats.org/drawingml/2006/main" prst="ellipse">
+                <a16:creationId xmlns:a16="http://schemas.microsoft.com/office/drawing/2014/main" id="{96796894-B108-4774-A179-E9EE9A040DED}"/>
+              </a:ext>
+            </a:extLst>
+          </p:cNvPr>
+          <p:cNvSpPr>
+            <a:spLocks xmlns:a="http://schemas.openxmlformats.org/drawingml/2006/main" noGrp="1"/>
+          </p:cNvSpPr>
+          <p:nvPr/>
+        </p:nvSpPr>
+        <p:spPr>
+          <a:xfrm xmlns:a="http://schemas.openxmlformats.org/drawingml/2006/main">
+            <a:off x="971550" y="2124075"/>
+            <a:ext cx="38100" cy="3524250"/>
+          </a:xfrm>
+          <a:prstGeom xmlns:a="http://schemas.openxmlformats.org/drawingml/2006/main" prst="rect">
             <a:avLst/>
           </a:prstGeom>
           <a:solidFill xmlns:a="http://schemas.openxmlformats.org/drawingml/2006/main">
-            <a:srgbClr val="18324A"/>
+            <a:srgbClr val="2C6E73"/>
           </a:solidFill>
           <a:ln xmlns:a="http://schemas.openxmlformats.org/drawingml/2006/main" w="0">
-            <a:noFill/>
+            <a:solidFill>
+              <a:srgbClr val="2C6E73"/>
+            </a:solidFill>
           </a:ln>
         </p:spPr>
       </p:sp>
@@ -8297,19 +8299,19 @@
           <p:cNvPr id="12" name="">
             <a:extLst xmlns:a="http://schemas.openxmlformats.org/drawingml/2006/main">
               <a:ext uri="{FF2B5EF4-FFF2-40B4-BE49-F238E27FC236}">
-                <a16:creationId xmlns:a16="http://schemas.microsoft.com/office/drawing/2014/main" id="{DD81E556-131B-44A4-AA70-45F9A5A04E4F}"/>
-              </a:ext>
-            </a:extLst>
-          </p:cNvPr>
-          <p:cNvSpPr>
-            <a:spLocks xmlns:a="http://schemas.openxmlformats.org/drawingml/2006/main" noGrp="1"/>
-          </p:cNvSpPr>
-          <p:nvPr/>
-        </p:nvSpPr>
-        <p:spPr>
-          <a:xfrm xmlns:a="http://schemas.openxmlformats.org/drawingml/2006/main">
-            <a:off x="1000125" y="2276475"/>
-            <a:ext cx="476250" cy="419100"/>
+                <a16:creationId xmlns:a16="http://schemas.microsoft.com/office/drawing/2014/main" id="{5F91CA20-81CE-43C0-B167-B055F6F739F5}"/>
+              </a:ext>
+            </a:extLst>
+          </p:cNvPr>
+          <p:cNvSpPr>
+            <a:spLocks xmlns:a="http://schemas.openxmlformats.org/drawingml/2006/main" noGrp="1"/>
+          </p:cNvSpPr>
+          <p:nvPr/>
+        </p:nvSpPr>
+        <p:spPr>
+          <a:xfrm xmlns:a="http://schemas.openxmlformats.org/drawingml/2006/main">
+            <a:off x="1162050" y="2200275"/>
+            <a:ext cx="400050" cy="400050"/>
           </a:xfrm>
           <a:prstGeom xmlns:a="http://schemas.openxmlformats.org/drawingml/2006/main" prst="rect">
             <a:avLst/>
@@ -8326,9 +8328,9 @@
           <a:lstStyle xmlns:a="http://schemas.openxmlformats.org/drawingml/2006/main"/>
           <a:p xmlns:a="http://schemas.openxmlformats.org/drawingml/2006/main">
             <a:pPr algn="ctr">
-              <a:defRPr sz="1350" b="1">
-                <a:solidFill>
-                  <a:srgbClr val="FFFFFF"/>
+              <a:defRPr sz="1125" b="1">
+                <a:solidFill>
+                  <a:srgbClr val="2C6E73"/>
                 </a:solidFill>
                 <a:latin typeface="Arial"/>
                 <a:ea typeface="Arial"/>
@@ -8336,9 +8338,9 @@
               </a:defRPr>
             </a:pPr>
             <a:r>
-              <a:rPr sz="1350" b="1">
-                <a:solidFill>
-                  <a:srgbClr val="FFFFFF"/>
+              <a:rPr sz="1125" b="1">
+                <a:solidFill>
+                  <a:srgbClr val="2C6E73"/>
                 </a:solidFill>
                 <a:latin typeface="Arial"/>
                 <a:ea typeface="Arial"/>
@@ -8354,19 +8356,19 @@
           <p:cNvPr id="13" name="">
             <a:extLst xmlns:a="http://schemas.openxmlformats.org/drawingml/2006/main">
               <a:ext uri="{FF2B5EF4-FFF2-40B4-BE49-F238E27FC236}">
-                <a16:creationId xmlns:a16="http://schemas.microsoft.com/office/drawing/2014/main" id="{7254F5C1-06EB-4DE7-97D2-621E8273A6E3}"/>
-              </a:ext>
-            </a:extLst>
-          </p:cNvPr>
-          <p:cNvSpPr>
-            <a:spLocks xmlns:a="http://schemas.openxmlformats.org/drawingml/2006/main" noGrp="1"/>
-          </p:cNvSpPr>
-          <p:nvPr/>
-        </p:nvSpPr>
-        <p:spPr>
-          <a:xfrm xmlns:a="http://schemas.openxmlformats.org/drawingml/2006/main">
-            <a:off x="1714500" y="2181225"/>
-            <a:ext cx="9429750" cy="609600"/>
+                <a16:creationId xmlns:a16="http://schemas.microsoft.com/office/drawing/2014/main" id="{00566D56-5C63-4321-9E7D-1B5DDED5E64C}"/>
+              </a:ext>
+            </a:extLst>
+          </p:cNvPr>
+          <p:cNvSpPr>
+            <a:spLocks xmlns:a="http://schemas.openxmlformats.org/drawingml/2006/main" noGrp="1"/>
+          </p:cNvSpPr>
+          <p:nvPr/>
+        </p:nvSpPr>
+        <p:spPr>
+          <a:xfrm xmlns:a="http://schemas.openxmlformats.org/drawingml/2006/main">
+            <a:off x="1714500" y="2114550"/>
+            <a:ext cx="9525000" cy="809625"/>
           </a:xfrm>
           <a:prstGeom xmlns:a="http://schemas.openxmlformats.org/drawingml/2006/main" prst="rect">
             <a:avLst/>
@@ -8383,7 +8385,7 @@
           <a:lstStyle xmlns:a="http://schemas.openxmlformats.org/drawingml/2006/main"/>
           <a:p xmlns:a="http://schemas.openxmlformats.org/drawingml/2006/main">
             <a:pPr algn="l">
-              <a:defRPr sz="1500" b="0">
+              <a:defRPr sz="1725" b="0">
                 <a:solidFill>
                   <a:srgbClr val="17253A"/>
                 </a:solidFill>
@@ -8393,7 +8395,7 @@
               </a:defRPr>
             </a:pPr>
             <a:r>
-              <a:rPr sz="1500" b="0">
+              <a:rPr sz="1725" b="0">
                 <a:solidFill>
                   <a:srgbClr val="17253A"/>
                 </a:solidFill>
@@ -8401,7 +8403,7 @@
                 <a:ea typeface="Arial"/>
                 <a:cs typeface="Arial"/>
               </a:rPr>
-              <a:t>Identify the structure: Identify which quantities the ratio compares and keep their order.</a:t>
+              <a:t>Red : blue = 8 : 12</a:t>
             </a:r>
           </a:p>
         </p:txBody>
@@ -8411,28 +8413,30 @@
           <p:cNvPr id="14" name="">
             <a:extLst xmlns:a="http://schemas.openxmlformats.org/drawingml/2006/main">
               <a:ext uri="{FF2B5EF4-FFF2-40B4-BE49-F238E27FC236}">
-                <a16:creationId xmlns:a16="http://schemas.microsoft.com/office/drawing/2014/main" id="{9F1B289A-96AA-419D-9206-0916E6B46052}"/>
-              </a:ext>
-            </a:extLst>
-          </p:cNvPr>
-          <p:cNvSpPr>
-            <a:spLocks xmlns:a="http://schemas.openxmlformats.org/drawingml/2006/main" noGrp="1"/>
-          </p:cNvSpPr>
-          <p:nvPr/>
-        </p:nvSpPr>
-        <p:spPr>
-          <a:xfrm xmlns:a="http://schemas.openxmlformats.org/drawingml/2006/main">
-            <a:off x="1000125" y="2990850"/>
-            <a:ext cx="476250" cy="476250"/>
-          </a:xfrm>
-          <a:prstGeom xmlns:a="http://schemas.openxmlformats.org/drawingml/2006/main" prst="ellipse">
+                <a16:creationId xmlns:a16="http://schemas.microsoft.com/office/drawing/2014/main" id="{2050472E-E201-4480-9023-A36C1CBE42D8}"/>
+              </a:ext>
+            </a:extLst>
+          </p:cNvPr>
+          <p:cNvSpPr>
+            <a:spLocks xmlns:a="http://schemas.openxmlformats.org/drawingml/2006/main" noGrp="1"/>
+          </p:cNvSpPr>
+          <p:nvPr/>
+        </p:nvSpPr>
+        <p:spPr>
+          <a:xfrm xmlns:a="http://schemas.openxmlformats.org/drawingml/2006/main">
+            <a:off x="1714500" y="2943225"/>
+            <a:ext cx="9334500" cy="9525"/>
+          </a:xfrm>
+          <a:prstGeom xmlns:a="http://schemas.openxmlformats.org/drawingml/2006/main" prst="rect">
             <a:avLst/>
           </a:prstGeom>
           <a:solidFill xmlns:a="http://schemas.openxmlformats.org/drawingml/2006/main">
-            <a:srgbClr val="2C6E73"/>
+            <a:srgbClr val="D9E0E6"/>
           </a:solidFill>
           <a:ln xmlns:a="http://schemas.openxmlformats.org/drawingml/2006/main" w="0">
-            <a:noFill/>
+            <a:solidFill>
+              <a:srgbClr val="D9E0E6"/>
+            </a:solidFill>
           </a:ln>
         </p:spPr>
       </p:sp>
@@ -8441,19 +8445,19 @@
           <p:cNvPr id="15" name="">
             <a:extLst xmlns:a="http://schemas.openxmlformats.org/drawingml/2006/main">
               <a:ext uri="{FF2B5EF4-FFF2-40B4-BE49-F238E27FC236}">
-                <a16:creationId xmlns:a16="http://schemas.microsoft.com/office/drawing/2014/main" id="{60E52760-E200-43E5-8322-7D45C457250E}"/>
-              </a:ext>
-            </a:extLst>
-          </p:cNvPr>
-          <p:cNvSpPr>
-            <a:spLocks xmlns:a="http://schemas.openxmlformats.org/drawingml/2006/main" noGrp="1"/>
-          </p:cNvSpPr>
-          <p:nvPr/>
-        </p:nvSpPr>
-        <p:spPr>
-          <a:xfrm xmlns:a="http://schemas.openxmlformats.org/drawingml/2006/main">
-            <a:off x="1000125" y="3019425"/>
-            <a:ext cx="476250" cy="419100"/>
+                <a16:creationId xmlns:a16="http://schemas.microsoft.com/office/drawing/2014/main" id="{36887B44-08FF-40EA-A019-4D939261B669}"/>
+              </a:ext>
+            </a:extLst>
+          </p:cNvPr>
+          <p:cNvSpPr>
+            <a:spLocks xmlns:a="http://schemas.openxmlformats.org/drawingml/2006/main" noGrp="1"/>
+          </p:cNvSpPr>
+          <p:nvPr/>
+        </p:nvSpPr>
+        <p:spPr>
+          <a:xfrm xmlns:a="http://schemas.openxmlformats.org/drawingml/2006/main">
+            <a:off x="1162050" y="3076575"/>
+            <a:ext cx="400050" cy="400050"/>
           </a:xfrm>
           <a:prstGeom xmlns:a="http://schemas.openxmlformats.org/drawingml/2006/main" prst="rect">
             <a:avLst/>
@@ -8470,9 +8474,9 @@
           <a:lstStyle xmlns:a="http://schemas.openxmlformats.org/drawingml/2006/main"/>
           <a:p xmlns:a="http://schemas.openxmlformats.org/drawingml/2006/main">
             <a:pPr algn="ctr">
-              <a:defRPr sz="1350" b="1">
-                <a:solidFill>
-                  <a:srgbClr val="FFFFFF"/>
+              <a:defRPr sz="1125" b="1">
+                <a:solidFill>
+                  <a:srgbClr val="2C6E73"/>
                 </a:solidFill>
                 <a:latin typeface="Arial"/>
                 <a:ea typeface="Arial"/>
@@ -8480,9 +8484,9 @@
               </a:defRPr>
             </a:pPr>
             <a:r>
-              <a:rPr sz="1350" b="1">
-                <a:solidFill>
-                  <a:srgbClr val="FFFFFF"/>
+              <a:rPr sz="1125" b="1">
+                <a:solidFill>
+                  <a:srgbClr val="2C6E73"/>
                 </a:solidFill>
                 <a:latin typeface="Arial"/>
                 <a:ea typeface="Arial"/>
@@ -8498,19 +8502,19 @@
           <p:cNvPr id="16" name="">
             <a:extLst xmlns:a="http://schemas.openxmlformats.org/drawingml/2006/main">
               <a:ext uri="{FF2B5EF4-FFF2-40B4-BE49-F238E27FC236}">
-                <a16:creationId xmlns:a16="http://schemas.microsoft.com/office/drawing/2014/main" id="{D49D76FC-FA1B-4550-92D2-57BCC46900DB}"/>
-              </a:ext>
-            </a:extLst>
-          </p:cNvPr>
-          <p:cNvSpPr>
-            <a:spLocks xmlns:a="http://schemas.openxmlformats.org/drawingml/2006/main" noGrp="1"/>
-          </p:cNvSpPr>
-          <p:nvPr/>
-        </p:nvSpPr>
-        <p:spPr>
-          <a:xfrm xmlns:a="http://schemas.openxmlformats.org/drawingml/2006/main">
-            <a:off x="1714500" y="2924175"/>
-            <a:ext cx="9429750" cy="609600"/>
+                <a16:creationId xmlns:a16="http://schemas.microsoft.com/office/drawing/2014/main" id="{B57FD288-51FD-4E14-9807-4E6B407E47CC}"/>
+              </a:ext>
+            </a:extLst>
+          </p:cNvPr>
+          <p:cNvSpPr>
+            <a:spLocks xmlns:a="http://schemas.openxmlformats.org/drawingml/2006/main" noGrp="1"/>
+          </p:cNvSpPr>
+          <p:nvPr/>
+        </p:nvSpPr>
+        <p:spPr>
+          <a:xfrm xmlns:a="http://schemas.openxmlformats.org/drawingml/2006/main">
+            <a:off x="1714500" y="2990850"/>
+            <a:ext cx="9525000" cy="809625"/>
           </a:xfrm>
           <a:prstGeom xmlns:a="http://schemas.openxmlformats.org/drawingml/2006/main" prst="rect">
             <a:avLst/>
@@ -8527,7 +8531,7 @@
           <a:lstStyle xmlns:a="http://schemas.openxmlformats.org/drawingml/2006/main"/>
           <a:p xmlns:a="http://schemas.openxmlformats.org/drawingml/2006/main">
             <a:pPr algn="l">
-              <a:defRPr sz="1500" b="0">
+              <a:defRPr sz="1725" b="0">
                 <a:solidFill>
                   <a:srgbClr val="17253A"/>
                 </a:solidFill>
@@ -8537,7 +8541,7 @@
               </a:defRPr>
             </a:pPr>
             <a:r>
-              <a:rPr sz="1500" b="0">
+              <a:rPr sz="1725" b="0">
                 <a:solidFill>
                   <a:srgbClr val="17253A"/>
                 </a:solidFill>
@@ -8545,7 +8549,7 @@
                 <a:ea typeface="Arial"/>
                 <a:cs typeface="Arial"/>
               </a:rPr>
-              <a:t>Set up the method: Scale both parts by the same factor.</a:t>
+              <a:t>Common factor = 4</a:t>
             </a:r>
           </a:p>
         </p:txBody>
@@ -8555,28 +8559,30 @@
           <p:cNvPr id="17" name="">
             <a:extLst xmlns:a="http://schemas.openxmlformats.org/drawingml/2006/main">
               <a:ext uri="{FF2B5EF4-FFF2-40B4-BE49-F238E27FC236}">
-                <a16:creationId xmlns:a16="http://schemas.microsoft.com/office/drawing/2014/main" id="{5BAAC411-64DD-41D8-825F-5608F5F4E816}"/>
-              </a:ext>
-            </a:extLst>
-          </p:cNvPr>
-          <p:cNvSpPr>
-            <a:spLocks xmlns:a="http://schemas.openxmlformats.org/drawingml/2006/main" noGrp="1"/>
-          </p:cNvSpPr>
-          <p:nvPr/>
-        </p:nvSpPr>
-        <p:spPr>
-          <a:xfrm xmlns:a="http://schemas.openxmlformats.org/drawingml/2006/main">
-            <a:off x="1000125" y="3733800"/>
-            <a:ext cx="476250" cy="476250"/>
-          </a:xfrm>
-          <a:prstGeom xmlns:a="http://schemas.openxmlformats.org/drawingml/2006/main" prst="ellipse">
+                <a16:creationId xmlns:a16="http://schemas.microsoft.com/office/drawing/2014/main" id="{FDC036CA-D63D-4878-A66E-84ECF18E1E2C}"/>
+              </a:ext>
+            </a:extLst>
+          </p:cNvPr>
+          <p:cNvSpPr>
+            <a:spLocks xmlns:a="http://schemas.openxmlformats.org/drawingml/2006/main" noGrp="1"/>
+          </p:cNvSpPr>
+          <p:nvPr/>
+        </p:nvSpPr>
+        <p:spPr>
+          <a:xfrm xmlns:a="http://schemas.openxmlformats.org/drawingml/2006/main">
+            <a:off x="1714500" y="3819525"/>
+            <a:ext cx="9334500" cy="9525"/>
+          </a:xfrm>
+          <a:prstGeom xmlns:a="http://schemas.openxmlformats.org/drawingml/2006/main" prst="rect">
             <a:avLst/>
           </a:prstGeom>
           <a:solidFill xmlns:a="http://schemas.openxmlformats.org/drawingml/2006/main">
-            <a:srgbClr val="2C6E73"/>
+            <a:srgbClr val="D9E0E6"/>
           </a:solidFill>
           <a:ln xmlns:a="http://schemas.openxmlformats.org/drawingml/2006/main" w="0">
-            <a:noFill/>
+            <a:solidFill>
+              <a:srgbClr val="D9E0E6"/>
+            </a:solidFill>
           </a:ln>
         </p:spPr>
       </p:sp>
@@ -8585,19 +8591,19 @@
           <p:cNvPr id="18" name="">
             <a:extLst xmlns:a="http://schemas.openxmlformats.org/drawingml/2006/main">
               <a:ext uri="{FF2B5EF4-FFF2-40B4-BE49-F238E27FC236}">
-                <a16:creationId xmlns:a16="http://schemas.microsoft.com/office/drawing/2014/main" id="{27A2FD23-1B47-4C89-AC3A-B4006DC85CC5}"/>
-              </a:ext>
-            </a:extLst>
-          </p:cNvPr>
-          <p:cNvSpPr>
-            <a:spLocks xmlns:a="http://schemas.openxmlformats.org/drawingml/2006/main" noGrp="1"/>
-          </p:cNvSpPr>
-          <p:nvPr/>
-        </p:nvSpPr>
-        <p:spPr>
-          <a:xfrm xmlns:a="http://schemas.openxmlformats.org/drawingml/2006/main">
-            <a:off x="1000125" y="3762375"/>
-            <a:ext cx="476250" cy="419100"/>
+                <a16:creationId xmlns:a16="http://schemas.microsoft.com/office/drawing/2014/main" id="{9C82CEA3-D4A9-4C3E-94D6-2E7313BF70C8}"/>
+              </a:ext>
+            </a:extLst>
+          </p:cNvPr>
+          <p:cNvSpPr>
+            <a:spLocks xmlns:a="http://schemas.openxmlformats.org/drawingml/2006/main" noGrp="1"/>
+          </p:cNvSpPr>
+          <p:nvPr/>
+        </p:nvSpPr>
+        <p:spPr>
+          <a:xfrm xmlns:a="http://schemas.openxmlformats.org/drawingml/2006/main">
+            <a:off x="1162050" y="3952875"/>
+            <a:ext cx="400050" cy="400050"/>
           </a:xfrm>
           <a:prstGeom xmlns:a="http://schemas.openxmlformats.org/drawingml/2006/main" prst="rect">
             <a:avLst/>
@@ -8614,9 +8620,9 @@
           <a:lstStyle xmlns:a="http://schemas.openxmlformats.org/drawingml/2006/main"/>
           <a:p xmlns:a="http://schemas.openxmlformats.org/drawingml/2006/main">
             <a:pPr algn="ctr">
-              <a:defRPr sz="1350" b="1">
-                <a:solidFill>
-                  <a:srgbClr val="FFFFFF"/>
+              <a:defRPr sz="1125" b="1">
+                <a:solidFill>
+                  <a:srgbClr val="2C6E73"/>
                 </a:solidFill>
                 <a:latin typeface="Arial"/>
                 <a:ea typeface="Arial"/>
@@ -8624,9 +8630,9 @@
               </a:defRPr>
             </a:pPr>
             <a:r>
-              <a:rPr sz="1350" b="1">
-                <a:solidFill>
-                  <a:srgbClr val="FFFFFF"/>
+              <a:rPr sz="1125" b="1">
+                <a:solidFill>
+                  <a:srgbClr val="2C6E73"/>
                 </a:solidFill>
                 <a:latin typeface="Arial"/>
                 <a:ea typeface="Arial"/>
@@ -8642,19 +8648,19 @@
           <p:cNvPr id="19" name="">
             <a:extLst xmlns:a="http://schemas.openxmlformats.org/drawingml/2006/main">
               <a:ext uri="{FF2B5EF4-FFF2-40B4-BE49-F238E27FC236}">
-                <a16:creationId xmlns:a16="http://schemas.microsoft.com/office/drawing/2014/main" id="{ADE35320-BDDF-478D-94E3-F3FD8DE99380}"/>
-              </a:ext>
-            </a:extLst>
-          </p:cNvPr>
-          <p:cNvSpPr>
-            <a:spLocks xmlns:a="http://schemas.openxmlformats.org/drawingml/2006/main" noGrp="1"/>
-          </p:cNvSpPr>
-          <p:nvPr/>
-        </p:nvSpPr>
-        <p:spPr>
-          <a:xfrm xmlns:a="http://schemas.openxmlformats.org/drawingml/2006/main">
-            <a:off x="1714500" y="3667125"/>
-            <a:ext cx="9429750" cy="609600"/>
+                <a16:creationId xmlns:a16="http://schemas.microsoft.com/office/drawing/2014/main" id="{A7C19C52-1C1D-4566-A6F7-C067CD46356B}"/>
+              </a:ext>
+            </a:extLst>
+          </p:cNvPr>
+          <p:cNvSpPr>
+            <a:spLocks xmlns:a="http://schemas.openxmlformats.org/drawingml/2006/main" noGrp="1"/>
+          </p:cNvSpPr>
+          <p:nvPr/>
+        </p:nvSpPr>
+        <p:spPr>
+          <a:xfrm xmlns:a="http://schemas.openxmlformats.org/drawingml/2006/main">
+            <a:off x="1714500" y="3867150"/>
+            <a:ext cx="9525000" cy="809625"/>
           </a:xfrm>
           <a:prstGeom xmlns:a="http://schemas.openxmlformats.org/drawingml/2006/main" prst="rect">
             <a:avLst/>
@@ -8671,7 +8677,7 @@
           <a:lstStyle xmlns:a="http://schemas.openxmlformats.org/drawingml/2006/main"/>
           <a:p xmlns:a="http://schemas.openxmlformats.org/drawingml/2006/main">
             <a:pPr algn="l">
-              <a:defRPr sz="1500" b="0">
+              <a:defRPr sz="1725" b="0">
                 <a:solidFill>
                   <a:srgbClr val="17253A"/>
                 </a:solidFill>
@@ -8681,7 +8687,7 @@
               </a:defRPr>
             </a:pPr>
             <a:r>
-              <a:rPr sz="1500" b="0">
+              <a:rPr sz="1725" b="0">
                 <a:solidFill>
                   <a:srgbClr val="17253A"/>
                 </a:solidFill>
@@ -8689,7 +8695,7 @@
                 <a:ea typeface="Arial"/>
                 <a:cs typeface="Arial"/>
               </a:rPr>
-              <a:t>Complete the calculation: 8:12, which simplifies to 2:3.</a:t>
+              <a:t>8 ÷ 4 : 12 ÷ 4</a:t>
             </a:r>
           </a:p>
         </p:txBody>
@@ -8699,28 +8705,30 @@
           <p:cNvPr id="20" name="">
             <a:extLst xmlns:a="http://schemas.openxmlformats.org/drawingml/2006/main">
               <a:ext uri="{FF2B5EF4-FFF2-40B4-BE49-F238E27FC236}">
-                <a16:creationId xmlns:a16="http://schemas.microsoft.com/office/drawing/2014/main" id="{6A004458-81E6-4FB1-A870-11C9D4F3D529}"/>
-              </a:ext>
-            </a:extLst>
-          </p:cNvPr>
-          <p:cNvSpPr>
-            <a:spLocks xmlns:a="http://schemas.openxmlformats.org/drawingml/2006/main" noGrp="1"/>
-          </p:cNvSpPr>
-          <p:nvPr/>
-        </p:nvSpPr>
-        <p:spPr>
-          <a:xfrm xmlns:a="http://schemas.openxmlformats.org/drawingml/2006/main">
-            <a:off x="1000125" y="4476750"/>
-            <a:ext cx="476250" cy="476250"/>
-          </a:xfrm>
-          <a:prstGeom xmlns:a="http://schemas.openxmlformats.org/drawingml/2006/main" prst="ellipse">
+                <a16:creationId xmlns:a16="http://schemas.microsoft.com/office/drawing/2014/main" id="{EB028474-C3D1-4E8A-9BF4-F1C3441C09D1}"/>
+              </a:ext>
+            </a:extLst>
+          </p:cNvPr>
+          <p:cNvSpPr>
+            <a:spLocks xmlns:a="http://schemas.openxmlformats.org/drawingml/2006/main" noGrp="1"/>
+          </p:cNvSpPr>
+          <p:nvPr/>
+        </p:nvSpPr>
+        <p:spPr>
+          <a:xfrm xmlns:a="http://schemas.openxmlformats.org/drawingml/2006/main">
+            <a:off x="1714500" y="4695825"/>
+            <a:ext cx="9334500" cy="9525"/>
+          </a:xfrm>
+          <a:prstGeom xmlns:a="http://schemas.openxmlformats.org/drawingml/2006/main" prst="rect">
             <a:avLst/>
           </a:prstGeom>
           <a:solidFill xmlns:a="http://schemas.openxmlformats.org/drawingml/2006/main">
-            <a:srgbClr val="2C6E73"/>
+            <a:srgbClr val="D9E0E6"/>
           </a:solidFill>
           <a:ln xmlns:a="http://schemas.openxmlformats.org/drawingml/2006/main" w="0">
-            <a:noFill/>
+            <a:solidFill>
+              <a:srgbClr val="D9E0E6"/>
+            </a:solidFill>
           </a:ln>
         </p:spPr>
       </p:sp>
@@ -8729,19 +8737,19 @@
           <p:cNvPr id="21" name="">
             <a:extLst xmlns:a="http://schemas.openxmlformats.org/drawingml/2006/main">
               <a:ext uri="{FF2B5EF4-FFF2-40B4-BE49-F238E27FC236}">
-                <a16:creationId xmlns:a16="http://schemas.microsoft.com/office/drawing/2014/main" id="{7C4DA65E-4654-4019-AFF4-DBAE3044DCF9}"/>
-              </a:ext>
-            </a:extLst>
-          </p:cNvPr>
-          <p:cNvSpPr>
-            <a:spLocks xmlns:a="http://schemas.openxmlformats.org/drawingml/2006/main" noGrp="1"/>
-          </p:cNvSpPr>
-          <p:nvPr/>
-        </p:nvSpPr>
-        <p:spPr>
-          <a:xfrm xmlns:a="http://schemas.openxmlformats.org/drawingml/2006/main">
-            <a:off x="1000125" y="4505325"/>
-            <a:ext cx="476250" cy="419100"/>
+                <a16:creationId xmlns:a16="http://schemas.microsoft.com/office/drawing/2014/main" id="{3670E704-DAB7-4AF2-98B9-524B7B3ADC2B}"/>
+              </a:ext>
+            </a:extLst>
+          </p:cNvPr>
+          <p:cNvSpPr>
+            <a:spLocks xmlns:a="http://schemas.openxmlformats.org/drawingml/2006/main" noGrp="1"/>
+          </p:cNvSpPr>
+          <p:nvPr/>
+        </p:nvSpPr>
+        <p:spPr>
+          <a:xfrm xmlns:a="http://schemas.openxmlformats.org/drawingml/2006/main">
+            <a:off x="1162050" y="4829175"/>
+            <a:ext cx="400050" cy="400050"/>
           </a:xfrm>
           <a:prstGeom xmlns:a="http://schemas.openxmlformats.org/drawingml/2006/main" prst="rect">
             <a:avLst/>
@@ -8758,9 +8766,9 @@
           <a:lstStyle xmlns:a="http://schemas.openxmlformats.org/drawingml/2006/main"/>
           <a:p xmlns:a="http://schemas.openxmlformats.org/drawingml/2006/main">
             <a:pPr algn="ctr">
-              <a:defRPr sz="1350" b="1">
-                <a:solidFill>
-                  <a:srgbClr val="FFFFFF"/>
+              <a:defRPr sz="1125" b="1">
+                <a:solidFill>
+                  <a:srgbClr val="2F785D"/>
                 </a:solidFill>
                 <a:latin typeface="Arial"/>
                 <a:ea typeface="Arial"/>
@@ -8768,9 +8776,9 @@
               </a:defRPr>
             </a:pPr>
             <a:r>
-              <a:rPr sz="1350" b="1">
-                <a:solidFill>
-                  <a:srgbClr val="FFFFFF"/>
+              <a:rPr sz="1125" b="1">
+                <a:solidFill>
+                  <a:srgbClr val="2F785D"/>
                 </a:solidFill>
                 <a:latin typeface="Arial"/>
                 <a:ea typeface="Arial"/>
@@ -8786,19 +8794,19 @@
           <p:cNvPr id="22" name="">
             <a:extLst xmlns:a="http://schemas.openxmlformats.org/drawingml/2006/main">
               <a:ext uri="{FF2B5EF4-FFF2-40B4-BE49-F238E27FC236}">
-                <a16:creationId xmlns:a16="http://schemas.microsoft.com/office/drawing/2014/main" id="{47A8C4DD-A8F3-4794-AAF8-75AE02C4264B}"/>
-              </a:ext>
-            </a:extLst>
-          </p:cNvPr>
-          <p:cNvSpPr>
-            <a:spLocks xmlns:a="http://schemas.openxmlformats.org/drawingml/2006/main" noGrp="1"/>
-          </p:cNvSpPr>
-          <p:nvPr/>
-        </p:nvSpPr>
-        <p:spPr>
-          <a:xfrm xmlns:a="http://schemas.openxmlformats.org/drawingml/2006/main">
-            <a:off x="1714500" y="4410075"/>
-            <a:ext cx="9429750" cy="609600"/>
+                <a16:creationId xmlns:a16="http://schemas.microsoft.com/office/drawing/2014/main" id="{0AA30143-9CA2-4E2E-A509-0A937BDAC9A9}"/>
+              </a:ext>
+            </a:extLst>
+          </p:cNvPr>
+          <p:cNvSpPr>
+            <a:spLocks xmlns:a="http://schemas.openxmlformats.org/drawingml/2006/main" noGrp="1"/>
+          </p:cNvSpPr>
+          <p:nvPr/>
+        </p:nvSpPr>
+        <p:spPr>
+          <a:xfrm xmlns:a="http://schemas.openxmlformats.org/drawingml/2006/main">
+            <a:off x="1714500" y="4743450"/>
+            <a:ext cx="9525000" cy="809625"/>
           </a:xfrm>
           <a:prstGeom xmlns:a="http://schemas.openxmlformats.org/drawingml/2006/main" prst="rect">
             <a:avLst/>
@@ -8815,7 +8823,7 @@
           <a:lstStyle xmlns:a="http://schemas.openxmlformats.org/drawingml/2006/main"/>
           <a:p xmlns:a="http://schemas.openxmlformats.org/drawingml/2006/main">
             <a:pPr algn="l">
-              <a:defRPr sz="1500" b="1">
+              <a:defRPr sz="1725" b="1">
                 <a:solidFill>
                   <a:srgbClr val="2F785D"/>
                 </a:solidFill>
@@ -8825,7 +8833,7 @@
               </a:defRPr>
             </a:pPr>
             <a:r>
-              <a:rPr sz="1500" b="1">
+              <a:rPr sz="1725" b="1">
                 <a:solidFill>
                   <a:srgbClr val="2F785D"/>
                 </a:solidFill>
@@ -8833,7 +8841,7 @@
                 <a:ea typeface="Arial"/>
                 <a:cs typeface="Arial"/>
               </a:rPr>
-              <a:t>Check the result: Check the relationship using a table, bar or sentence.</a:t>
+              <a:t>2 : 3</a:t>
             </a:r>
           </a:p>
         </p:txBody>
@@ -8841,7 +8849,7 @@
     </p:spTree>
     <p:extLst>
       <p:ext uri="{BB962C8B-B14F-4D97-AF65-F5344CB8AC3E}">
-        <p14:creationId xmlns:p14="http://schemas.microsoft.com/office/powerpoint/2010/main" val="533788023"/>
+        <p14:creationId xmlns:p14="http://schemas.microsoft.com/office/powerpoint/2010/main" val="1338737314"/>
       </p:ext>
     </p:extLst>
   </p:cSld>
@@ -9134,7 +9142,7 @@
           <p:cNvPr id="15" name="">
             <a:extLst xmlns:a="http://schemas.openxmlformats.org/drawingml/2006/main">
               <a:ext uri="{FF2B5EF4-FFF2-40B4-BE49-F238E27FC236}">
-                <a16:creationId xmlns:a16="http://schemas.microsoft.com/office/drawing/2014/main" id="{F056AD89-2924-45DB-895B-92FD77A269B8}"/>
+                <a16:creationId xmlns:a16="http://schemas.microsoft.com/office/drawing/2014/main" id="{99F66561-666F-4221-A801-8C831E1811DD}"/>
               </a:ext>
             </a:extLst>
           </p:cNvPr>
@@ -9166,7 +9174,7 @@
           <p:cNvPr id="2" name="">
             <a:extLst xmlns:a="http://schemas.openxmlformats.org/drawingml/2006/main">
               <a:ext uri="{FF2B5EF4-FFF2-40B4-BE49-F238E27FC236}">
-                <a16:creationId xmlns:a16="http://schemas.microsoft.com/office/drawing/2014/main" id="{C40E61D7-F0D5-4AED-AC0D-0B597951E6BE}"/>
+                <a16:creationId xmlns:a16="http://schemas.microsoft.com/office/drawing/2014/main" id="{31224407-75C6-448F-ADCA-F5235A4DF8D2}"/>
               </a:ext>
             </a:extLst>
           </p:cNvPr>
@@ -9223,7 +9231,7 @@
           <p:cNvPr id="3" name="">
             <a:extLst xmlns:a="http://schemas.openxmlformats.org/drawingml/2006/main">
               <a:ext uri="{FF2B5EF4-FFF2-40B4-BE49-F238E27FC236}">
-                <a16:creationId xmlns:a16="http://schemas.microsoft.com/office/drawing/2014/main" id="{388CE477-A986-4B5E-913B-8C3BD64BC496}"/>
+                <a16:creationId xmlns:a16="http://schemas.microsoft.com/office/drawing/2014/main" id="{3214F59B-2A71-4D65-8D94-E91AA14BE558}"/>
               </a:ext>
             </a:extLst>
           </p:cNvPr>
@@ -9255,7 +9263,7 @@
           <p:cNvPr id="4" name="">
             <a:extLst xmlns:a="http://schemas.openxmlformats.org/drawingml/2006/main">
               <a:ext uri="{FF2B5EF4-FFF2-40B4-BE49-F238E27FC236}">
-                <a16:creationId xmlns:a16="http://schemas.microsoft.com/office/drawing/2014/main" id="{45E18049-4853-4FA0-AB68-1F9F77D9B413}"/>
+                <a16:creationId xmlns:a16="http://schemas.microsoft.com/office/drawing/2014/main" id="{185F2DCD-7627-42C8-9921-A624E75D6528}"/>
               </a:ext>
             </a:extLst>
           </p:cNvPr>
@@ -9312,7 +9320,7 @@
           <p:cNvPr id="5" name="">
             <a:extLst xmlns:a="http://schemas.openxmlformats.org/drawingml/2006/main">
               <a:ext uri="{FF2B5EF4-FFF2-40B4-BE49-F238E27FC236}">
-                <a16:creationId xmlns:a16="http://schemas.microsoft.com/office/drawing/2014/main" id="{AC45661B-E66C-478D-81CB-D36303E3B9CE}"/>
+                <a16:creationId xmlns:a16="http://schemas.microsoft.com/office/drawing/2014/main" id="{CCCABA1C-5096-43AC-A78D-D617484823C8}"/>
               </a:ext>
             </a:extLst>
           </p:cNvPr>
@@ -9369,7 +9377,7 @@
           <p:cNvPr id="6" name="">
             <a:extLst xmlns:a="http://schemas.openxmlformats.org/drawingml/2006/main">
               <a:ext uri="{FF2B5EF4-FFF2-40B4-BE49-F238E27FC236}">
-                <a16:creationId xmlns:a16="http://schemas.microsoft.com/office/drawing/2014/main" id="{D82C6C01-93FF-43A8-83FB-6BA3CDAECA08}"/>
+                <a16:creationId xmlns:a16="http://schemas.microsoft.com/office/drawing/2014/main" id="{537BEDCB-2448-43A9-8321-8A69A3E6AF53}"/>
               </a:ext>
             </a:extLst>
           </p:cNvPr>
@@ -9426,7 +9434,7 @@
           <p:cNvPr id="7" name="">
             <a:extLst xmlns:a="http://schemas.openxmlformats.org/drawingml/2006/main">
               <a:ext uri="{FF2B5EF4-FFF2-40B4-BE49-F238E27FC236}">
-                <a16:creationId xmlns:a16="http://schemas.microsoft.com/office/drawing/2014/main" id="{F79B3B88-4B2A-4CA7-8397-4647FF81A331}"/>
+                <a16:creationId xmlns:a16="http://schemas.microsoft.com/office/drawing/2014/main" id="{73D2F977-65B1-426E-9535-355431041F12}"/>
               </a:ext>
             </a:extLst>
           </p:cNvPr>
@@ -9458,7 +9466,7 @@
           <p:cNvPr id="8" name="">
             <a:extLst xmlns:a="http://schemas.openxmlformats.org/drawingml/2006/main">
               <a:ext uri="{FF2B5EF4-FFF2-40B4-BE49-F238E27FC236}">
-                <a16:creationId xmlns:a16="http://schemas.microsoft.com/office/drawing/2014/main" id="{677B3100-E1B7-4DC2-AD7C-B818B30B0E1E}"/>
+                <a16:creationId xmlns:a16="http://schemas.microsoft.com/office/drawing/2014/main" id="{D20B9E77-023F-4309-953F-99D027EDB161}"/>
               </a:ext>
             </a:extLst>
           </p:cNvPr>
@@ -9515,7 +9523,7 @@
           <p:cNvPr id="9" name="">
             <a:extLst xmlns:a="http://schemas.openxmlformats.org/drawingml/2006/main">
               <a:ext uri="{FF2B5EF4-FFF2-40B4-BE49-F238E27FC236}">
-                <a16:creationId xmlns:a16="http://schemas.microsoft.com/office/drawing/2014/main" id="{D6629EA5-5866-4E28-A0FC-4FF7AED47E44}"/>
+                <a16:creationId xmlns:a16="http://schemas.microsoft.com/office/drawing/2014/main" id="{C5ED9FA5-310A-4A22-88B7-F70EEE749583}"/>
               </a:ext>
             </a:extLst>
           </p:cNvPr>
@@ -9572,7 +9580,7 @@
           <p:cNvPr id="10" name="">
             <a:extLst xmlns:a="http://schemas.openxmlformats.org/drawingml/2006/main">
               <a:ext uri="{FF2B5EF4-FFF2-40B4-BE49-F238E27FC236}">
-                <a16:creationId xmlns:a16="http://schemas.microsoft.com/office/drawing/2014/main" id="{775EE46A-E994-45F8-B1E4-57172D7D7681}"/>
+                <a16:creationId xmlns:a16="http://schemas.microsoft.com/office/drawing/2014/main" id="{CDA10C46-E7CE-4C5D-ACE4-5C80C82243BF}"/>
               </a:ext>
             </a:extLst>
           </p:cNvPr>
@@ -9629,7 +9637,7 @@
           <p:cNvPr id="11" name="">
             <a:extLst xmlns:a="http://schemas.openxmlformats.org/drawingml/2006/main">
               <a:ext uri="{FF2B5EF4-FFF2-40B4-BE49-F238E27FC236}">
-                <a16:creationId xmlns:a16="http://schemas.microsoft.com/office/drawing/2014/main" id="{6876395F-6FFF-42E9-8633-F8E17A081F85}"/>
+                <a16:creationId xmlns:a16="http://schemas.microsoft.com/office/drawing/2014/main" id="{97B542BC-6A79-422F-9808-18426F5E6D24}"/>
               </a:ext>
             </a:extLst>
           </p:cNvPr>
@@ -9686,7 +9694,7 @@
           <p:cNvPr id="12" name="">
             <a:extLst xmlns:a="http://schemas.openxmlformats.org/drawingml/2006/main">
               <a:ext uri="{FF2B5EF4-FFF2-40B4-BE49-F238E27FC236}">
-                <a16:creationId xmlns:a16="http://schemas.microsoft.com/office/drawing/2014/main" id="{8C1C04BD-3975-469E-9FF3-C441B7F6A35B}"/>
+                <a16:creationId xmlns:a16="http://schemas.microsoft.com/office/drawing/2014/main" id="{632745A3-9509-45B3-927F-5B4A85C0B4C8}"/>
               </a:ext>
             </a:extLst>
           </p:cNvPr>
@@ -9718,7 +9726,7 @@
           <p:cNvPr id="13" name="">
             <a:extLst xmlns:a="http://schemas.openxmlformats.org/drawingml/2006/main">
               <a:ext uri="{FF2B5EF4-FFF2-40B4-BE49-F238E27FC236}">
-                <a16:creationId xmlns:a16="http://schemas.microsoft.com/office/drawing/2014/main" id="{9B82C526-7C3E-4229-9A35-582DEBCDC70F}"/>
+                <a16:creationId xmlns:a16="http://schemas.microsoft.com/office/drawing/2014/main" id="{C680923A-FC8A-4CB9-B3E2-6DA4A8C6AC83}"/>
               </a:ext>
             </a:extLst>
           </p:cNvPr>
@@ -9775,7 +9783,7 @@
           <p:cNvPr id="14" name="">
             <a:extLst xmlns:a="http://schemas.openxmlformats.org/drawingml/2006/main">
               <a:ext uri="{FF2B5EF4-FFF2-40B4-BE49-F238E27FC236}">
-                <a16:creationId xmlns:a16="http://schemas.microsoft.com/office/drawing/2014/main" id="{7D67B001-5994-4955-87C2-B3A41EF6302E}"/>
+                <a16:creationId xmlns:a16="http://schemas.microsoft.com/office/drawing/2014/main" id="{C02D7326-D6F5-4713-9850-3C3A01464848}"/>
               </a:ext>
             </a:extLst>
           </p:cNvPr>
@@ -9830,7 +9838,7 @@
     </p:spTree>
     <p:extLst>
       <p:ext uri="{BB962C8B-B14F-4D97-AF65-F5344CB8AC3E}">
-        <p14:creationId xmlns:p14="http://schemas.microsoft.com/office/powerpoint/2010/main" val="1534004120"/>
+        <p14:creationId xmlns:p14="http://schemas.microsoft.com/office/powerpoint/2010/main" val="1610060386"/>
       </p:ext>
     </p:extLst>
   </p:cSld>
@@ -10031,7 +10039,7 @@
           <p:cNvPr id="16" name="">
             <a:extLst xmlns:a="http://schemas.openxmlformats.org/drawingml/2006/main">
               <a:ext uri="{FF2B5EF4-FFF2-40B4-BE49-F238E27FC236}">
-                <a16:creationId xmlns:a16="http://schemas.microsoft.com/office/drawing/2014/main" id="{E67058D6-E75A-4046-88E7-24A221ED9485}"/>
+                <a16:creationId xmlns:a16="http://schemas.microsoft.com/office/drawing/2014/main" id="{9D179B4A-2625-457B-9733-AB236EA8FA38}"/>
               </a:ext>
             </a:extLst>
           </p:cNvPr>
@@ -10063,7 +10071,7 @@
           <p:cNvPr id="2" name="">
             <a:extLst xmlns:a="http://schemas.openxmlformats.org/drawingml/2006/main">
               <a:ext uri="{FF2B5EF4-FFF2-40B4-BE49-F238E27FC236}">
-                <a16:creationId xmlns:a16="http://schemas.microsoft.com/office/drawing/2014/main" id="{AF7D2995-C2CD-4CAC-BDBE-86EA067DC3E3}"/>
+                <a16:creationId xmlns:a16="http://schemas.microsoft.com/office/drawing/2014/main" id="{1DFA42D2-CD08-4074-8BF7-47C697AFD3A5}"/>
               </a:ext>
             </a:extLst>
           </p:cNvPr>
@@ -10120,7 +10128,7 @@
           <p:cNvPr id="3" name="">
             <a:extLst xmlns:a="http://schemas.openxmlformats.org/drawingml/2006/main">
               <a:ext uri="{FF2B5EF4-FFF2-40B4-BE49-F238E27FC236}">
-                <a16:creationId xmlns:a16="http://schemas.microsoft.com/office/drawing/2014/main" id="{15B8F251-B9DD-4AE6-9686-1E15BFA6170C}"/>
+                <a16:creationId xmlns:a16="http://schemas.microsoft.com/office/drawing/2014/main" id="{BE34CFAD-277B-4416-A6D6-3BEC3A0FF414}"/>
               </a:ext>
             </a:extLst>
           </p:cNvPr>
@@ -10152,7 +10160,7 @@
           <p:cNvPr id="4" name="">
             <a:extLst xmlns:a="http://schemas.openxmlformats.org/drawingml/2006/main">
               <a:ext uri="{FF2B5EF4-FFF2-40B4-BE49-F238E27FC236}">
-                <a16:creationId xmlns:a16="http://schemas.microsoft.com/office/drawing/2014/main" id="{342C289A-5C17-4F5A-9827-7FE39AD52B03}"/>
+                <a16:creationId xmlns:a16="http://schemas.microsoft.com/office/drawing/2014/main" id="{9A9DE086-FEF8-4ED3-BA8C-63647BEAC02E}"/>
               </a:ext>
             </a:extLst>
           </p:cNvPr>
@@ -10209,7 +10217,7 @@
           <p:cNvPr id="5" name="">
             <a:extLst xmlns:a="http://schemas.openxmlformats.org/drawingml/2006/main">
               <a:ext uri="{FF2B5EF4-FFF2-40B4-BE49-F238E27FC236}">
-                <a16:creationId xmlns:a16="http://schemas.microsoft.com/office/drawing/2014/main" id="{64CB74C2-A2AA-4646-99C0-9A2CF192F96F}"/>
+                <a16:creationId xmlns:a16="http://schemas.microsoft.com/office/drawing/2014/main" id="{32F73873-4580-4957-BCEA-8BE3F9CC3DE5}"/>
               </a:ext>
             </a:extLst>
           </p:cNvPr>
@@ -10266,7 +10274,7 @@
           <p:cNvPr id="6" name="">
             <a:extLst xmlns:a="http://schemas.openxmlformats.org/drawingml/2006/main">
               <a:ext uri="{FF2B5EF4-FFF2-40B4-BE49-F238E27FC236}">
-                <a16:creationId xmlns:a16="http://schemas.microsoft.com/office/drawing/2014/main" id="{1408B4D1-CDA6-43C5-BF85-887135FBC779}"/>
+                <a16:creationId xmlns:a16="http://schemas.microsoft.com/office/drawing/2014/main" id="{7FC5DBFF-78AD-42F9-A75C-F42ABCE7467B}"/>
               </a:ext>
             </a:extLst>
           </p:cNvPr>
@@ -10323,7 +10331,7 @@
           <p:cNvPr id="7" name="">
             <a:extLst xmlns:a="http://schemas.openxmlformats.org/drawingml/2006/main">
               <a:ext uri="{FF2B5EF4-FFF2-40B4-BE49-F238E27FC236}">
-                <a16:creationId xmlns:a16="http://schemas.microsoft.com/office/drawing/2014/main" id="{74BFAF29-BEEA-42F5-ABAB-B3E0AAEEFB55}"/>
+                <a16:creationId xmlns:a16="http://schemas.microsoft.com/office/drawing/2014/main" id="{A3DF39F6-DEF5-4B62-AAB3-C3571FF39747}"/>
               </a:ext>
             </a:extLst>
           </p:cNvPr>
@@ -10355,7 +10363,7 @@
           <p:cNvPr id="8" name="">
             <a:extLst xmlns:a="http://schemas.openxmlformats.org/drawingml/2006/main">
               <a:ext uri="{FF2B5EF4-FFF2-40B4-BE49-F238E27FC236}">
-                <a16:creationId xmlns:a16="http://schemas.microsoft.com/office/drawing/2014/main" id="{8E7CAF6A-26F5-465F-B2C8-FC9751A1A472}"/>
+                <a16:creationId xmlns:a16="http://schemas.microsoft.com/office/drawing/2014/main" id="{B7BBDE3E-6022-4CB2-8A48-20F1AFE765BD}"/>
               </a:ext>
             </a:extLst>
           </p:cNvPr>
@@ -10412,7 +10420,7 @@
           <p:cNvPr id="9" name="">
             <a:extLst xmlns:a="http://schemas.openxmlformats.org/drawingml/2006/main">
               <a:ext uri="{FF2B5EF4-FFF2-40B4-BE49-F238E27FC236}">
-                <a16:creationId xmlns:a16="http://schemas.microsoft.com/office/drawing/2014/main" id="{F82C4850-7035-4AF2-83BF-502BD49B42A0}"/>
+                <a16:creationId xmlns:a16="http://schemas.microsoft.com/office/drawing/2014/main" id="{35D8990A-F8A5-494E-A549-AC94CD04B52C}"/>
               </a:ext>
             </a:extLst>
           </p:cNvPr>
@@ -10469,7 +10477,7 @@
           <p:cNvPr id="10" name="">
             <a:extLst xmlns:a="http://schemas.openxmlformats.org/drawingml/2006/main">
               <a:ext uri="{FF2B5EF4-FFF2-40B4-BE49-F238E27FC236}">
-                <a16:creationId xmlns:a16="http://schemas.microsoft.com/office/drawing/2014/main" id="{3E88D3DC-308D-4482-B314-A2D07478365D}"/>
+                <a16:creationId xmlns:a16="http://schemas.microsoft.com/office/drawing/2014/main" id="{57D353F2-1DB9-427F-84E3-A27686ECDFE1}"/>
               </a:ext>
             </a:extLst>
           </p:cNvPr>
@@ -10526,7 +10534,7 @@
           <p:cNvPr id="11" name="">
             <a:extLst xmlns:a="http://schemas.openxmlformats.org/drawingml/2006/main">
               <a:ext uri="{FF2B5EF4-FFF2-40B4-BE49-F238E27FC236}">
-                <a16:creationId xmlns:a16="http://schemas.microsoft.com/office/drawing/2014/main" id="{D8D3314C-8DCA-424E-ABD7-8F2369C16625}"/>
+                <a16:creationId xmlns:a16="http://schemas.microsoft.com/office/drawing/2014/main" id="{70FE3513-B924-456A-9963-99A2F60E1B1E}"/>
               </a:ext>
             </a:extLst>
           </p:cNvPr>
@@ -10583,7 +10591,7 @@
           <p:cNvPr id="12" name="">
             <a:extLst xmlns:a="http://schemas.openxmlformats.org/drawingml/2006/main">
               <a:ext uri="{FF2B5EF4-FFF2-40B4-BE49-F238E27FC236}">
-                <a16:creationId xmlns:a16="http://schemas.microsoft.com/office/drawing/2014/main" id="{D6129B45-AFD3-416E-898A-450CAA9A435A}"/>
+                <a16:creationId xmlns:a16="http://schemas.microsoft.com/office/drawing/2014/main" id="{8FACAA01-C4ED-4934-9BE0-1B8B9F1268BE}"/>
               </a:ext>
             </a:extLst>
           </p:cNvPr>
@@ -10640,7 +10648,7 @@
           <p:cNvPr id="13" name="">
             <a:extLst xmlns:a="http://schemas.openxmlformats.org/drawingml/2006/main">
               <a:ext uri="{FF2B5EF4-FFF2-40B4-BE49-F238E27FC236}">
-                <a16:creationId xmlns:a16="http://schemas.microsoft.com/office/drawing/2014/main" id="{FCC4495C-F6FB-490B-B18C-0EE838D2058D}"/>
+                <a16:creationId xmlns:a16="http://schemas.microsoft.com/office/drawing/2014/main" id="{6E7D4EDB-2D42-4F4D-ADB5-5506C54756CB}"/>
               </a:ext>
             </a:extLst>
           </p:cNvPr>
@@ -10697,7 +10705,7 @@
           <p:cNvPr id="14" name="">
             <a:extLst xmlns:a="http://schemas.openxmlformats.org/drawingml/2006/main">
               <a:ext uri="{FF2B5EF4-FFF2-40B4-BE49-F238E27FC236}">
-                <a16:creationId xmlns:a16="http://schemas.microsoft.com/office/drawing/2014/main" id="{3093AC24-EA17-48A0-8CB3-090DADFBC096}"/>
+                <a16:creationId xmlns:a16="http://schemas.microsoft.com/office/drawing/2014/main" id="{9DE187C2-B3DE-4653-8E3A-FD8D91A4F85B}"/>
               </a:ext>
             </a:extLst>
           </p:cNvPr>
@@ -10754,7 +10762,7 @@
           <p:cNvPr id="15" name="">
             <a:extLst xmlns:a="http://schemas.openxmlformats.org/drawingml/2006/main">
               <a:ext uri="{FF2B5EF4-FFF2-40B4-BE49-F238E27FC236}">
-                <a16:creationId xmlns:a16="http://schemas.microsoft.com/office/drawing/2014/main" id="{66765278-7EA3-4356-9AF4-BCE9C1EAFAAE}"/>
+                <a16:creationId xmlns:a16="http://schemas.microsoft.com/office/drawing/2014/main" id="{7749CEAF-998C-49B7-A889-D77FC3136DF4}"/>
               </a:ext>
             </a:extLst>
           </p:cNvPr>
@@ -10809,7 +10817,7 @@
     </p:spTree>
     <p:extLst>
       <p:ext uri="{BB962C8B-B14F-4D97-AF65-F5344CB8AC3E}">
-        <p14:creationId xmlns:p14="http://schemas.microsoft.com/office/powerpoint/2010/main" val="1998350182"/>
+        <p14:creationId xmlns:p14="http://schemas.microsoft.com/office/powerpoint/2010/main" val="1605627806"/>
       </p:ext>
     </p:extLst>
   </p:cSld>
@@ -10964,7 +10972,7 @@
           <p:cNvPr id="16" name="">
             <a:extLst xmlns:a="http://schemas.openxmlformats.org/drawingml/2006/main">
               <a:ext uri="{FF2B5EF4-FFF2-40B4-BE49-F238E27FC236}">
-                <a16:creationId xmlns:a16="http://schemas.microsoft.com/office/drawing/2014/main" id="{73CABC38-F5DA-47FC-B1FA-34F5D0845934}"/>
+                <a16:creationId xmlns:a16="http://schemas.microsoft.com/office/drawing/2014/main" id="{1F030D8E-854A-4E44-B34C-3A559E6DE775}"/>
               </a:ext>
             </a:extLst>
           </p:cNvPr>
@@ -10996,7 +11004,7 @@
           <p:cNvPr id="2" name="">
             <a:extLst xmlns:a="http://schemas.openxmlformats.org/drawingml/2006/main">
               <a:ext uri="{FF2B5EF4-FFF2-40B4-BE49-F238E27FC236}">
-                <a16:creationId xmlns:a16="http://schemas.microsoft.com/office/drawing/2014/main" id="{CEBE97BE-3CB7-4139-B3D3-D474C78B3091}"/>
+                <a16:creationId xmlns:a16="http://schemas.microsoft.com/office/drawing/2014/main" id="{9D9298FF-E452-45C7-8B4A-377CD9E64A20}"/>
               </a:ext>
             </a:extLst>
           </p:cNvPr>
@@ -11053,7 +11061,7 @@
           <p:cNvPr id="3" name="">
             <a:extLst xmlns:a="http://schemas.openxmlformats.org/drawingml/2006/main">
               <a:ext uri="{FF2B5EF4-FFF2-40B4-BE49-F238E27FC236}">
-                <a16:creationId xmlns:a16="http://schemas.microsoft.com/office/drawing/2014/main" id="{394525BF-65E4-408F-A4A6-A0E423EAAD7E}"/>
+                <a16:creationId xmlns:a16="http://schemas.microsoft.com/office/drawing/2014/main" id="{2771E39B-6ADA-4A95-8FCB-12F10ACF2AF5}"/>
               </a:ext>
             </a:extLst>
           </p:cNvPr>
@@ -11085,7 +11093,7 @@
           <p:cNvPr id="4" name="">
             <a:extLst xmlns:a="http://schemas.openxmlformats.org/drawingml/2006/main">
               <a:ext uri="{FF2B5EF4-FFF2-40B4-BE49-F238E27FC236}">
-                <a16:creationId xmlns:a16="http://schemas.microsoft.com/office/drawing/2014/main" id="{858D2354-9C4E-45B3-9047-CE3B3D2BFEEC}"/>
+                <a16:creationId xmlns:a16="http://schemas.microsoft.com/office/drawing/2014/main" id="{8309EE98-DA0E-45E1-BF76-71CE805F3E96}"/>
               </a:ext>
             </a:extLst>
           </p:cNvPr>
@@ -11142,7 +11150,7 @@
           <p:cNvPr id="5" name="">
             <a:extLst xmlns:a="http://schemas.openxmlformats.org/drawingml/2006/main">
               <a:ext uri="{FF2B5EF4-FFF2-40B4-BE49-F238E27FC236}">
-                <a16:creationId xmlns:a16="http://schemas.microsoft.com/office/drawing/2014/main" id="{873A15CC-9F4E-4685-AA88-0E0AD3277985}"/>
+                <a16:creationId xmlns:a16="http://schemas.microsoft.com/office/drawing/2014/main" id="{191D2815-1FF1-4B5F-A037-F0BA6909D717}"/>
               </a:ext>
             </a:extLst>
           </p:cNvPr>
@@ -11199,7 +11207,7 @@
           <p:cNvPr id="6" name="">
             <a:extLst xmlns:a="http://schemas.openxmlformats.org/drawingml/2006/main">
               <a:ext uri="{FF2B5EF4-FFF2-40B4-BE49-F238E27FC236}">
-                <a16:creationId xmlns:a16="http://schemas.microsoft.com/office/drawing/2014/main" id="{CFDDCE8F-C45A-4A9E-A726-9BA8188B7A91}"/>
+                <a16:creationId xmlns:a16="http://schemas.microsoft.com/office/drawing/2014/main" id="{5F4EC2D1-08BF-46AC-B322-B0DCCF60B831}"/>
               </a:ext>
             </a:extLst>
           </p:cNvPr>
@@ -11256,7 +11264,7 @@
           <p:cNvPr id="7" name="">
             <a:extLst xmlns:a="http://schemas.openxmlformats.org/drawingml/2006/main">
               <a:ext uri="{FF2B5EF4-FFF2-40B4-BE49-F238E27FC236}">
-                <a16:creationId xmlns:a16="http://schemas.microsoft.com/office/drawing/2014/main" id="{2A8D2F3A-F48E-40E5-B095-5D720DB8B9F5}"/>
+                <a16:creationId xmlns:a16="http://schemas.microsoft.com/office/drawing/2014/main" id="{42C46FEA-3C3F-4D06-91FE-0A430DF77604}"/>
               </a:ext>
             </a:extLst>
           </p:cNvPr>
@@ -11288,7 +11296,7 @@
           <p:cNvPr id="8" name="">
             <a:extLst xmlns:a="http://schemas.openxmlformats.org/drawingml/2006/main">
               <a:ext uri="{FF2B5EF4-FFF2-40B4-BE49-F238E27FC236}">
-                <a16:creationId xmlns:a16="http://schemas.microsoft.com/office/drawing/2014/main" id="{E6E49700-54C3-4657-AA58-4E28939E1B4E}"/>
+                <a16:creationId xmlns:a16="http://schemas.microsoft.com/office/drawing/2014/main" id="{C5EBB462-A31D-4D4B-9FB1-E2AC990095E3}"/>
               </a:ext>
             </a:extLst>
           </p:cNvPr>
@@ -11345,7 +11353,7 @@
           <p:cNvPr id="9" name="">
             <a:extLst xmlns:a="http://schemas.openxmlformats.org/drawingml/2006/main">
               <a:ext uri="{FF2B5EF4-FFF2-40B4-BE49-F238E27FC236}">
-                <a16:creationId xmlns:a16="http://schemas.microsoft.com/office/drawing/2014/main" id="{453DF1EE-6F7D-4BFF-90FE-E9841B00E011}"/>
+                <a16:creationId xmlns:a16="http://schemas.microsoft.com/office/drawing/2014/main" id="{E873FC20-462B-40E0-BF84-6C89D3E76D9C}"/>
               </a:ext>
             </a:extLst>
           </p:cNvPr>
@@ -11406,7 +11414,7 @@
           <p:nvPr/>
         </p:nvPicPr>
         <p:blipFill>
-          <a:blip xmlns:r="http://schemas.openxmlformats.org/officeDocument/2006/relationships" xmlns:a="http://schemas.openxmlformats.org/drawingml/2006/main" r:embed="Ra74d0d2f86bc4cb0"/>
+          <a:blip xmlns:r="http://schemas.openxmlformats.org/officeDocument/2006/relationships" xmlns:a="http://schemas.openxmlformats.org/drawingml/2006/main" r:embed="R882bff5d14094ed7"/>
           <a:stretch xmlns:a="http://schemas.openxmlformats.org/drawingml/2006/main"/>
         </p:blipFill>
         <p:spPr>
@@ -11424,7 +11432,7 @@
           <p:cNvPr id="11" name="">
             <a:extLst xmlns:a="http://schemas.openxmlformats.org/drawingml/2006/main">
               <a:ext uri="{FF2B5EF4-FFF2-40B4-BE49-F238E27FC236}">
-                <a16:creationId xmlns:a16="http://schemas.microsoft.com/office/drawing/2014/main" id="{166455C3-E170-4D08-B50E-DB74370B1B07}"/>
+                <a16:creationId xmlns:a16="http://schemas.microsoft.com/office/drawing/2014/main" id="{D4A3BC7F-C09E-4CC1-9046-85B217D20AEB}"/>
               </a:ext>
             </a:extLst>
           </p:cNvPr>
@@ -11481,7 +11489,7 @@
           <p:cNvPr id="12" name="">
             <a:extLst xmlns:a="http://schemas.openxmlformats.org/drawingml/2006/main">
               <a:ext uri="{FF2B5EF4-FFF2-40B4-BE49-F238E27FC236}">
-                <a16:creationId xmlns:a16="http://schemas.microsoft.com/office/drawing/2014/main" id="{73EE04E4-F436-4062-89A9-B69CDBF73BFA}"/>
+                <a16:creationId xmlns:a16="http://schemas.microsoft.com/office/drawing/2014/main" id="{65EA00C2-4DA3-4495-9DAF-2588A5CDD852}"/>
               </a:ext>
             </a:extLst>
           </p:cNvPr>
@@ -11538,7 +11546,7 @@
           <p:cNvPr id="13" name="">
             <a:extLst xmlns:a="http://schemas.openxmlformats.org/drawingml/2006/main">
               <a:ext uri="{FF2B5EF4-FFF2-40B4-BE49-F238E27FC236}">
-                <a16:creationId xmlns:a16="http://schemas.microsoft.com/office/drawing/2014/main" id="{02AEC6C8-F025-410D-A21E-EC0287C8F1AC}"/>
+                <a16:creationId xmlns:a16="http://schemas.microsoft.com/office/drawing/2014/main" id="{8725AEEF-CDA9-4F3E-8E22-D92E50C0C523}"/>
               </a:ext>
             </a:extLst>
           </p:cNvPr>
@@ -11570,7 +11578,7 @@
           <p:cNvPr id="14" name="">
             <a:extLst xmlns:a="http://schemas.openxmlformats.org/drawingml/2006/main">
               <a:ext uri="{FF2B5EF4-FFF2-40B4-BE49-F238E27FC236}">
-                <a16:creationId xmlns:a16="http://schemas.microsoft.com/office/drawing/2014/main" id="{CBC8B4B7-21C8-4424-B30B-97D8882C8B8E}"/>
+                <a16:creationId xmlns:a16="http://schemas.microsoft.com/office/drawing/2014/main" id="{4DC9F344-E135-434F-8A97-8065C4CCB670}"/>
               </a:ext>
             </a:extLst>
           </p:cNvPr>
@@ -11627,7 +11635,7 @@
           <p:cNvPr id="15" name="">
             <a:extLst xmlns:a="http://schemas.openxmlformats.org/drawingml/2006/main">
               <a:ext uri="{FF2B5EF4-FFF2-40B4-BE49-F238E27FC236}">
-                <a16:creationId xmlns:a16="http://schemas.microsoft.com/office/drawing/2014/main" id="{5FB8E32B-4FEA-4102-B100-6E9301627580}"/>
+                <a16:creationId xmlns:a16="http://schemas.microsoft.com/office/drawing/2014/main" id="{FA376C2C-D81D-4FD1-A5E4-45C3ADCC9390}"/>
               </a:ext>
             </a:extLst>
           </p:cNvPr>
@@ -11682,7 +11690,7 @@
     </p:spTree>
     <p:extLst>
       <p:ext uri="{BB962C8B-B14F-4D97-AF65-F5344CB8AC3E}">
-        <p14:creationId xmlns:p14="http://schemas.microsoft.com/office/powerpoint/2010/main" val="1033665571"/>
+        <p14:creationId xmlns:p14="http://schemas.microsoft.com/office/powerpoint/2010/main" val="1704611530"/>
       </p:ext>
     </p:extLst>
   </p:cSld>
@@ -11837,7 +11845,7 @@
           <p:cNvPr id="23" name="">
             <a:extLst xmlns:a="http://schemas.openxmlformats.org/drawingml/2006/main">
               <a:ext uri="{FF2B5EF4-FFF2-40B4-BE49-F238E27FC236}">
-                <a16:creationId xmlns:a16="http://schemas.microsoft.com/office/drawing/2014/main" id="{DA06A583-6EEC-4CF8-8A4A-E3E33696EE22}"/>
+                <a16:creationId xmlns:a16="http://schemas.microsoft.com/office/drawing/2014/main" id="{8A3AED52-2C4F-4C16-A18C-5CE941562B53}"/>
               </a:ext>
             </a:extLst>
           </p:cNvPr>
@@ -11869,7 +11877,7 @@
           <p:cNvPr id="2" name="">
             <a:extLst xmlns:a="http://schemas.openxmlformats.org/drawingml/2006/main">
               <a:ext uri="{FF2B5EF4-FFF2-40B4-BE49-F238E27FC236}">
-                <a16:creationId xmlns:a16="http://schemas.microsoft.com/office/drawing/2014/main" id="{66B3F067-8D61-4B2C-9144-7A56E2087AE3}"/>
+                <a16:creationId xmlns:a16="http://schemas.microsoft.com/office/drawing/2014/main" id="{10741CB7-B5B9-49D0-BDAD-9F6B5E292287}"/>
               </a:ext>
             </a:extLst>
           </p:cNvPr>
@@ -11926,7 +11934,7 @@
           <p:cNvPr id="3" name="">
             <a:extLst xmlns:a="http://schemas.openxmlformats.org/drawingml/2006/main">
               <a:ext uri="{FF2B5EF4-FFF2-40B4-BE49-F238E27FC236}">
-                <a16:creationId xmlns:a16="http://schemas.microsoft.com/office/drawing/2014/main" id="{0F0E7B18-5DB6-4E04-8773-9F1C5383D89E}"/>
+                <a16:creationId xmlns:a16="http://schemas.microsoft.com/office/drawing/2014/main" id="{1FBA63D5-01FC-410C-A645-041CE6373E79}"/>
               </a:ext>
             </a:extLst>
           </p:cNvPr>
@@ -11958,7 +11966,7 @@
           <p:cNvPr id="4" name="">
             <a:extLst xmlns:a="http://schemas.openxmlformats.org/drawingml/2006/main">
               <a:ext uri="{FF2B5EF4-FFF2-40B4-BE49-F238E27FC236}">
-                <a16:creationId xmlns:a16="http://schemas.microsoft.com/office/drawing/2014/main" id="{E801CDCB-7C2A-4C68-97C9-4C4B854A9706}"/>
+                <a16:creationId xmlns:a16="http://schemas.microsoft.com/office/drawing/2014/main" id="{7CF798F8-F45E-4458-9FF7-86F6B9B73817}"/>
               </a:ext>
             </a:extLst>
           </p:cNvPr>
@@ -12015,7 +12023,7 @@
           <p:cNvPr id="5" name="">
             <a:extLst xmlns:a="http://schemas.openxmlformats.org/drawingml/2006/main">
               <a:ext uri="{FF2B5EF4-FFF2-40B4-BE49-F238E27FC236}">
-                <a16:creationId xmlns:a16="http://schemas.microsoft.com/office/drawing/2014/main" id="{309E6C79-EDDD-476A-87EB-FDD96D7B9294}"/>
+                <a16:creationId xmlns:a16="http://schemas.microsoft.com/office/drawing/2014/main" id="{3939038E-6A43-402B-BD67-68FF5D7B0235}"/>
               </a:ext>
             </a:extLst>
           </p:cNvPr>
@@ -12072,7 +12080,7 @@
           <p:cNvPr id="6" name="">
             <a:extLst xmlns:a="http://schemas.openxmlformats.org/drawingml/2006/main">
               <a:ext uri="{FF2B5EF4-FFF2-40B4-BE49-F238E27FC236}">
-                <a16:creationId xmlns:a16="http://schemas.microsoft.com/office/drawing/2014/main" id="{22F77DB5-057C-4B1B-94A4-97BAC74AE995}"/>
+                <a16:creationId xmlns:a16="http://schemas.microsoft.com/office/drawing/2014/main" id="{D661A391-7589-4780-A9B9-4485841146A0}"/>
               </a:ext>
             </a:extLst>
           </p:cNvPr>
@@ -12129,7 +12137,7 @@
           <p:cNvPr id="7" name="">
             <a:extLst xmlns:a="http://schemas.openxmlformats.org/drawingml/2006/main">
               <a:ext uri="{FF2B5EF4-FFF2-40B4-BE49-F238E27FC236}">
-                <a16:creationId xmlns:a16="http://schemas.microsoft.com/office/drawing/2014/main" id="{C1E43D54-90D2-44A3-A617-77CDDEEF38D7}"/>
+                <a16:creationId xmlns:a16="http://schemas.microsoft.com/office/drawing/2014/main" id="{9C228363-D98D-4549-980D-233E93430571}"/>
               </a:ext>
             </a:extLst>
           </p:cNvPr>
@@ -12161,7 +12169,7 @@
           <p:cNvPr id="8" name="">
             <a:extLst xmlns:a="http://schemas.openxmlformats.org/drawingml/2006/main">
               <a:ext uri="{FF2B5EF4-FFF2-40B4-BE49-F238E27FC236}">
-                <a16:creationId xmlns:a16="http://schemas.microsoft.com/office/drawing/2014/main" id="{DC70F80A-BDC0-4BD9-AFE3-FE9C2B7119BA}"/>
+                <a16:creationId xmlns:a16="http://schemas.microsoft.com/office/drawing/2014/main" id="{A70C4CE8-B296-45A0-9100-9B812ED871B4}"/>
               </a:ext>
             </a:extLst>
           </p:cNvPr>
@@ -12218,7 +12226,7 @@
           <p:cNvPr id="9" name="">
             <a:extLst xmlns:a="http://schemas.openxmlformats.org/drawingml/2006/main">
               <a:ext uri="{FF2B5EF4-FFF2-40B4-BE49-F238E27FC236}">
-                <a16:creationId xmlns:a16="http://schemas.microsoft.com/office/drawing/2014/main" id="{DCB8DC0B-5DDB-4684-847B-FCDF9F4AF9A8}"/>
+                <a16:creationId xmlns:a16="http://schemas.microsoft.com/office/drawing/2014/main" id="{68D0F700-58A5-43BE-8885-CEB798AD6748}"/>
               </a:ext>
             </a:extLst>
           </p:cNvPr>
@@ -12275,7 +12283,7 @@
           <p:cNvPr id="10" name="">
             <a:extLst xmlns:a="http://schemas.openxmlformats.org/drawingml/2006/main">
               <a:ext uri="{FF2B5EF4-FFF2-40B4-BE49-F238E27FC236}">
-                <a16:creationId xmlns:a16="http://schemas.microsoft.com/office/drawing/2014/main" id="{EF7F427D-9FA6-45F2-8DFA-7376F3AE5E13}"/>
+                <a16:creationId xmlns:a16="http://schemas.microsoft.com/office/drawing/2014/main" id="{034E2756-FA98-4829-AA4F-957B51055BF5}"/>
               </a:ext>
             </a:extLst>
           </p:cNvPr>
@@ -12309,7 +12317,7 @@
           <p:cNvPr id="11" name="">
             <a:extLst xmlns:a="http://schemas.openxmlformats.org/drawingml/2006/main">
               <a:ext uri="{FF2B5EF4-FFF2-40B4-BE49-F238E27FC236}">
-                <a16:creationId xmlns:a16="http://schemas.microsoft.com/office/drawing/2014/main" id="{B608B7BE-61CF-4C68-ABAA-8DB436809783}"/>
+                <a16:creationId xmlns:a16="http://schemas.microsoft.com/office/drawing/2014/main" id="{7A5BCCB0-C312-4BC3-AD6C-48F8424AADD5}"/>
               </a:ext>
             </a:extLst>
           </p:cNvPr>
@@ -12341,7 +12349,7 @@
           <p:cNvPr id="12" name="">
             <a:extLst xmlns:a="http://schemas.openxmlformats.org/drawingml/2006/main">
               <a:ext uri="{FF2B5EF4-FFF2-40B4-BE49-F238E27FC236}">
-                <a16:creationId xmlns:a16="http://schemas.microsoft.com/office/drawing/2014/main" id="{10F01F00-7C47-4C63-BA99-D31B9BD34D45}"/>
+                <a16:creationId xmlns:a16="http://schemas.microsoft.com/office/drawing/2014/main" id="{FE1707B4-CD23-472B-9E5E-0E7158A8E42C}"/>
               </a:ext>
             </a:extLst>
           </p:cNvPr>
@@ -12398,7 +12406,7 @@
           <p:cNvPr id="13" name="">
             <a:extLst xmlns:a="http://schemas.openxmlformats.org/drawingml/2006/main">
               <a:ext uri="{FF2B5EF4-FFF2-40B4-BE49-F238E27FC236}">
-                <a16:creationId xmlns:a16="http://schemas.microsoft.com/office/drawing/2014/main" id="{EAD81B90-72AD-4B89-9711-D07EF3FFAD05}"/>
+                <a16:creationId xmlns:a16="http://schemas.microsoft.com/office/drawing/2014/main" id="{33372806-35B8-4E47-B986-1703D8C5A8BF}"/>
               </a:ext>
             </a:extLst>
           </p:cNvPr>
@@ -12455,7 +12463,7 @@
           <p:cNvPr id="14" name="">
             <a:extLst xmlns:a="http://schemas.openxmlformats.org/drawingml/2006/main">
               <a:ext uri="{FF2B5EF4-FFF2-40B4-BE49-F238E27FC236}">
-                <a16:creationId xmlns:a16="http://schemas.microsoft.com/office/drawing/2014/main" id="{4BF99AE7-6CB7-48D4-9D18-ADFCB4FDA34F}"/>
+                <a16:creationId xmlns:a16="http://schemas.microsoft.com/office/drawing/2014/main" id="{2F818EB6-27AD-4FE0-9EDA-6225D2D5EB64}"/>
               </a:ext>
             </a:extLst>
           </p:cNvPr>
@@ -12489,7 +12497,7 @@
           <p:cNvPr id="15" name="">
             <a:extLst xmlns:a="http://schemas.openxmlformats.org/drawingml/2006/main">
               <a:ext uri="{FF2B5EF4-FFF2-40B4-BE49-F238E27FC236}">
-                <a16:creationId xmlns:a16="http://schemas.microsoft.com/office/drawing/2014/main" id="{1C7BCD6B-C650-4205-A725-1BCF0E78A7BB}"/>
+                <a16:creationId xmlns:a16="http://schemas.microsoft.com/office/drawing/2014/main" id="{1E4601C7-85A7-43A4-8372-ADEE0E4AB8B1}"/>
               </a:ext>
             </a:extLst>
           </p:cNvPr>
@@ -12521,7 +12529,7 @@
           <p:cNvPr id="16" name="">
             <a:extLst xmlns:a="http://schemas.openxmlformats.org/drawingml/2006/main">
               <a:ext uri="{FF2B5EF4-FFF2-40B4-BE49-F238E27FC236}">
-                <a16:creationId xmlns:a16="http://schemas.microsoft.com/office/drawing/2014/main" id="{CDAC1041-7E5E-47DC-99B4-75F757B1A4B8}"/>
+                <a16:creationId xmlns:a16="http://schemas.microsoft.com/office/drawing/2014/main" id="{820BA250-B1AF-4288-9D59-17C347EEBA33}"/>
               </a:ext>
             </a:extLst>
           </p:cNvPr>
@@ -12578,7 +12586,7 @@
           <p:cNvPr id="17" name="">
             <a:extLst xmlns:a="http://schemas.openxmlformats.org/drawingml/2006/main">
               <a:ext uri="{FF2B5EF4-FFF2-40B4-BE49-F238E27FC236}">
-                <a16:creationId xmlns:a16="http://schemas.microsoft.com/office/drawing/2014/main" id="{DC11F6EB-36F8-4322-9C38-97FA1CF90D56}"/>
+                <a16:creationId xmlns:a16="http://schemas.microsoft.com/office/drawing/2014/main" id="{B93521DC-2E5A-457F-9F3F-51A0EC03EFA2}"/>
               </a:ext>
             </a:extLst>
           </p:cNvPr>
@@ -12635,7 +12643,7 @@
           <p:cNvPr id="18" name="">
             <a:extLst xmlns:a="http://schemas.openxmlformats.org/drawingml/2006/main">
               <a:ext uri="{FF2B5EF4-FFF2-40B4-BE49-F238E27FC236}">
-                <a16:creationId xmlns:a16="http://schemas.microsoft.com/office/drawing/2014/main" id="{2E5F642B-3106-45F1-A06C-2840509FAFD9}"/>
+                <a16:creationId xmlns:a16="http://schemas.microsoft.com/office/drawing/2014/main" id="{141ECC28-00C0-4F35-BD4C-ED586FF5BB64}"/>
               </a:ext>
             </a:extLst>
           </p:cNvPr>
@@ -12669,7 +12677,7 @@
           <p:cNvPr id="19" name="">
             <a:extLst xmlns:a="http://schemas.openxmlformats.org/drawingml/2006/main">
               <a:ext uri="{FF2B5EF4-FFF2-40B4-BE49-F238E27FC236}">
-                <a16:creationId xmlns:a16="http://schemas.microsoft.com/office/drawing/2014/main" id="{FDD1311B-3FD9-4C04-ACB4-CB0EC9597539}"/>
+                <a16:creationId xmlns:a16="http://schemas.microsoft.com/office/drawing/2014/main" id="{00ABF979-1585-435E-BDD6-6785E66BA3EE}"/>
               </a:ext>
             </a:extLst>
           </p:cNvPr>
@@ -12701,7 +12709,7 @@
           <p:cNvPr id="20" name="">
             <a:extLst xmlns:a="http://schemas.openxmlformats.org/drawingml/2006/main">
               <a:ext uri="{FF2B5EF4-FFF2-40B4-BE49-F238E27FC236}">
-                <a16:creationId xmlns:a16="http://schemas.microsoft.com/office/drawing/2014/main" id="{694D8F51-8882-43ED-900F-A3F0F16253FD}"/>
+                <a16:creationId xmlns:a16="http://schemas.microsoft.com/office/drawing/2014/main" id="{7F703BD3-24A3-4F0B-B1A1-B693594511B6}"/>
               </a:ext>
             </a:extLst>
           </p:cNvPr>
@@ -12758,7 +12766,7 @@
           <p:cNvPr id="21" name="">
             <a:extLst xmlns:a="http://schemas.openxmlformats.org/drawingml/2006/main">
               <a:ext uri="{FF2B5EF4-FFF2-40B4-BE49-F238E27FC236}">
-                <a16:creationId xmlns:a16="http://schemas.microsoft.com/office/drawing/2014/main" id="{8B5EB0CC-AF3B-462C-B68C-1D97E0334480}"/>
+                <a16:creationId xmlns:a16="http://schemas.microsoft.com/office/drawing/2014/main" id="{46EB1422-0545-464A-9D00-B423DE05F930}"/>
               </a:ext>
             </a:extLst>
           </p:cNvPr>
@@ -12815,7 +12823,7 @@
           <p:cNvPr id="22" name="">
             <a:extLst xmlns:a="http://schemas.openxmlformats.org/drawingml/2006/main">
               <a:ext uri="{FF2B5EF4-FFF2-40B4-BE49-F238E27FC236}">
-                <a16:creationId xmlns:a16="http://schemas.microsoft.com/office/drawing/2014/main" id="{0856E97A-3B49-4BE4-B19F-1D80AD95826F}"/>
+                <a16:creationId xmlns:a16="http://schemas.microsoft.com/office/drawing/2014/main" id="{FA746492-2ADF-4829-9A14-577E7A539A50}"/>
               </a:ext>
             </a:extLst>
           </p:cNvPr>
@@ -12870,7 +12878,7 @@
     </p:spTree>
     <p:extLst>
       <p:ext uri="{BB962C8B-B14F-4D97-AF65-F5344CB8AC3E}">
-        <p14:creationId xmlns:p14="http://schemas.microsoft.com/office/powerpoint/2010/main" val="1845423694"/>
+        <p14:creationId xmlns:p14="http://schemas.microsoft.com/office/powerpoint/2010/main" val="1942505362"/>
       </p:ext>
     </p:extLst>
   </p:cSld>
@@ -13071,7 +13079,7 @@
           <p:cNvPr id="22" name="">
             <a:extLst xmlns:a="http://schemas.openxmlformats.org/drawingml/2006/main">
               <a:ext uri="{FF2B5EF4-FFF2-40B4-BE49-F238E27FC236}">
-                <a16:creationId xmlns:a16="http://schemas.microsoft.com/office/drawing/2014/main" id="{9BCF4FF9-6217-4A9D-B673-3E57BED990AE}"/>
+                <a16:creationId xmlns:a16="http://schemas.microsoft.com/office/drawing/2014/main" id="{638A3569-9796-40D8-AC13-2CF1019911E1}"/>
               </a:ext>
             </a:extLst>
           </p:cNvPr>
@@ -13103,7 +13111,7 @@
           <p:cNvPr id="2" name="">
             <a:extLst xmlns:a="http://schemas.openxmlformats.org/drawingml/2006/main">
               <a:ext uri="{FF2B5EF4-FFF2-40B4-BE49-F238E27FC236}">
-                <a16:creationId xmlns:a16="http://schemas.microsoft.com/office/drawing/2014/main" id="{837E06FA-1153-4D60-8E8B-78348CD67522}"/>
+                <a16:creationId xmlns:a16="http://schemas.microsoft.com/office/drawing/2014/main" id="{96C707DE-B440-4F72-AA48-C711C1A3EE67}"/>
               </a:ext>
             </a:extLst>
           </p:cNvPr>
@@ -13160,7 +13168,7 @@
           <p:cNvPr id="3" name="">
             <a:extLst xmlns:a="http://schemas.openxmlformats.org/drawingml/2006/main">
               <a:ext uri="{FF2B5EF4-FFF2-40B4-BE49-F238E27FC236}">
-                <a16:creationId xmlns:a16="http://schemas.microsoft.com/office/drawing/2014/main" id="{E2D3588B-0906-4D33-8EA5-DC53092E2E72}"/>
+                <a16:creationId xmlns:a16="http://schemas.microsoft.com/office/drawing/2014/main" id="{16836059-610F-4D71-BDC9-70A985BA9C81}"/>
               </a:ext>
             </a:extLst>
           </p:cNvPr>
@@ -13192,7 +13200,7 @@
           <p:cNvPr id="4" name="">
             <a:extLst xmlns:a="http://schemas.openxmlformats.org/drawingml/2006/main">
               <a:ext uri="{FF2B5EF4-FFF2-40B4-BE49-F238E27FC236}">
-                <a16:creationId xmlns:a16="http://schemas.microsoft.com/office/drawing/2014/main" id="{7046EE55-B994-4497-9C82-070714C6D013}"/>
+                <a16:creationId xmlns:a16="http://schemas.microsoft.com/office/drawing/2014/main" id="{1248AAB1-D09F-462E-AAAF-DA30A36D5D0D}"/>
               </a:ext>
             </a:extLst>
           </p:cNvPr>
@@ -13249,7 +13257,7 @@
           <p:cNvPr id="5" name="">
             <a:extLst xmlns:a="http://schemas.openxmlformats.org/drawingml/2006/main">
               <a:ext uri="{FF2B5EF4-FFF2-40B4-BE49-F238E27FC236}">
-                <a16:creationId xmlns:a16="http://schemas.microsoft.com/office/drawing/2014/main" id="{9A52C5E3-B138-41B1-A0CA-A011A1885E6A}"/>
+                <a16:creationId xmlns:a16="http://schemas.microsoft.com/office/drawing/2014/main" id="{F861233B-88FA-44FF-AFFF-A3EAEBE87674}"/>
               </a:ext>
             </a:extLst>
           </p:cNvPr>
@@ -13306,7 +13314,7 @@
           <p:cNvPr id="6" name="">
             <a:extLst xmlns:a="http://schemas.openxmlformats.org/drawingml/2006/main">
               <a:ext uri="{FF2B5EF4-FFF2-40B4-BE49-F238E27FC236}">
-                <a16:creationId xmlns:a16="http://schemas.microsoft.com/office/drawing/2014/main" id="{7EC8747D-CA9C-4077-B569-26C27CDE1065}"/>
+                <a16:creationId xmlns:a16="http://schemas.microsoft.com/office/drawing/2014/main" id="{6F760AC0-1874-4EA1-8CB7-68295966CDF7}"/>
               </a:ext>
             </a:extLst>
           </p:cNvPr>
@@ -13363,7 +13371,7 @@
           <p:cNvPr id="7" name="">
             <a:extLst xmlns:a="http://schemas.openxmlformats.org/drawingml/2006/main">
               <a:ext uri="{FF2B5EF4-FFF2-40B4-BE49-F238E27FC236}">
-                <a16:creationId xmlns:a16="http://schemas.microsoft.com/office/drawing/2014/main" id="{3B087D8B-FB2B-455F-AF5C-5F1CC4931973}"/>
+                <a16:creationId xmlns:a16="http://schemas.microsoft.com/office/drawing/2014/main" id="{EC3EFCDF-0623-49AF-8952-3A6C9E79A39E}"/>
               </a:ext>
             </a:extLst>
           </p:cNvPr>
@@ -13395,7 +13403,7 @@
           <p:cNvPr id="8" name="">
             <a:extLst xmlns:a="http://schemas.openxmlformats.org/drawingml/2006/main">
               <a:ext uri="{FF2B5EF4-FFF2-40B4-BE49-F238E27FC236}">
-                <a16:creationId xmlns:a16="http://schemas.microsoft.com/office/drawing/2014/main" id="{148455E2-10E6-46CE-A765-180ADE0D65FD}"/>
+                <a16:creationId xmlns:a16="http://schemas.microsoft.com/office/drawing/2014/main" id="{8801D67D-D820-4F30-87BC-68D0BF8B8BA7}"/>
               </a:ext>
             </a:extLst>
           </p:cNvPr>
@@ -13452,7 +13460,7 @@
           <p:cNvPr id="9" name="">
             <a:extLst xmlns:a="http://schemas.openxmlformats.org/drawingml/2006/main">
               <a:ext uri="{FF2B5EF4-FFF2-40B4-BE49-F238E27FC236}">
-                <a16:creationId xmlns:a16="http://schemas.microsoft.com/office/drawing/2014/main" id="{61CED5A1-FC53-444B-852F-40B5B0E00359}"/>
+                <a16:creationId xmlns:a16="http://schemas.microsoft.com/office/drawing/2014/main" id="{FF07D626-9952-4780-BFD9-947948738DBC}"/>
               </a:ext>
             </a:extLst>
           </p:cNvPr>
@@ -13509,7 +13517,7 @@
           <p:cNvPr id="10" name="">
             <a:extLst xmlns:a="http://schemas.openxmlformats.org/drawingml/2006/main">
               <a:ext uri="{FF2B5EF4-FFF2-40B4-BE49-F238E27FC236}">
-                <a16:creationId xmlns:a16="http://schemas.microsoft.com/office/drawing/2014/main" id="{72B3E115-0161-47BA-8974-58F341AEE041}"/>
+                <a16:creationId xmlns:a16="http://schemas.microsoft.com/office/drawing/2014/main" id="{EDF7D69A-81C8-4F56-93A5-EE5ACB18C553}"/>
               </a:ext>
             </a:extLst>
           </p:cNvPr>
@@ -13543,7 +13551,7 @@
           <p:cNvPr id="11" name="">
             <a:extLst xmlns:a="http://schemas.openxmlformats.org/drawingml/2006/main">
               <a:ext uri="{FF2B5EF4-FFF2-40B4-BE49-F238E27FC236}">
-                <a16:creationId xmlns:a16="http://schemas.microsoft.com/office/drawing/2014/main" id="{D77E3EDE-7718-4EF6-A55E-3AC586AA44E2}"/>
+                <a16:creationId xmlns:a16="http://schemas.microsoft.com/office/drawing/2014/main" id="{228AE8FB-6CD8-4F59-9971-5A2E818D607E}"/>
               </a:ext>
             </a:extLst>
           </p:cNvPr>
@@ -13575,7 +13583,7 @@
           <p:cNvPr id="12" name="">
             <a:extLst xmlns:a="http://schemas.openxmlformats.org/drawingml/2006/main">
               <a:ext uri="{FF2B5EF4-FFF2-40B4-BE49-F238E27FC236}">
-                <a16:creationId xmlns:a16="http://schemas.microsoft.com/office/drawing/2014/main" id="{8E9B64F5-047E-4755-8DA7-BF794ADEDD73}"/>
+                <a16:creationId xmlns:a16="http://schemas.microsoft.com/office/drawing/2014/main" id="{304EBA60-3D67-4F51-8040-AA32966A9789}"/>
               </a:ext>
             </a:extLst>
           </p:cNvPr>
@@ -13632,7 +13640,7 @@
           <p:cNvPr id="13" name="">
             <a:extLst xmlns:a="http://schemas.openxmlformats.org/drawingml/2006/main">
               <a:ext uri="{FF2B5EF4-FFF2-40B4-BE49-F238E27FC236}">
-                <a16:creationId xmlns:a16="http://schemas.microsoft.com/office/drawing/2014/main" id="{B920CE5A-33BB-41D5-99E0-307F3B4E1D59}"/>
+                <a16:creationId xmlns:a16="http://schemas.microsoft.com/office/drawing/2014/main" id="{028DEF9F-AB03-4377-A615-CDE252B37BA9}"/>
               </a:ext>
             </a:extLst>
           </p:cNvPr>
@@ -13689,7 +13697,7 @@
           <p:cNvPr id="14" name="">
             <a:extLst xmlns:a="http://schemas.openxmlformats.org/drawingml/2006/main">
               <a:ext uri="{FF2B5EF4-FFF2-40B4-BE49-F238E27FC236}">
-                <a16:creationId xmlns:a16="http://schemas.microsoft.com/office/drawing/2014/main" id="{4885E5A5-CC38-47C9-9976-4E7B0AAB1048}"/>
+                <a16:creationId xmlns:a16="http://schemas.microsoft.com/office/drawing/2014/main" id="{52CB253F-1E08-4584-B3B0-F74160209B36}"/>
               </a:ext>
             </a:extLst>
           </p:cNvPr>
@@ -13723,7 +13731,7 @@
           <p:cNvPr id="15" name="">
             <a:extLst xmlns:a="http://schemas.openxmlformats.org/drawingml/2006/main">
               <a:ext uri="{FF2B5EF4-FFF2-40B4-BE49-F238E27FC236}">
-                <a16:creationId xmlns:a16="http://schemas.microsoft.com/office/drawing/2014/main" id="{0C6D6DCE-DB7D-4A66-BC39-56EC76031AAC}"/>
+                <a16:creationId xmlns:a16="http://schemas.microsoft.com/office/drawing/2014/main" id="{5CC56005-33BC-4315-BAF0-1FF1D992455F}"/>
               </a:ext>
             </a:extLst>
           </p:cNvPr>
@@ -13755,7 +13763,7 @@
           <p:cNvPr id="16" name="">
             <a:extLst xmlns:a="http://schemas.openxmlformats.org/drawingml/2006/main">
               <a:ext uri="{FF2B5EF4-FFF2-40B4-BE49-F238E27FC236}">
-                <a16:creationId xmlns:a16="http://schemas.microsoft.com/office/drawing/2014/main" id="{AB465537-4565-416C-B9AB-30642837FDCD}"/>
+                <a16:creationId xmlns:a16="http://schemas.microsoft.com/office/drawing/2014/main" id="{29CC06B3-441E-4F14-A10E-88E60E736C4D}"/>
               </a:ext>
             </a:extLst>
           </p:cNvPr>
@@ -13812,7 +13820,7 @@
           <p:cNvPr id="17" name="">
             <a:extLst xmlns:a="http://schemas.openxmlformats.org/drawingml/2006/main">
               <a:ext uri="{FF2B5EF4-FFF2-40B4-BE49-F238E27FC236}">
-                <a16:creationId xmlns:a16="http://schemas.microsoft.com/office/drawing/2014/main" id="{A785B174-E75E-4508-9F7C-92C634F3E0EF}"/>
+                <a16:creationId xmlns:a16="http://schemas.microsoft.com/office/drawing/2014/main" id="{FC7D9817-6315-49EC-A69B-6C53F2D0B185}"/>
               </a:ext>
             </a:extLst>
           </p:cNvPr>
@@ -13869,7 +13877,7 @@
           <p:cNvPr id="18" name="">
             <a:extLst xmlns:a="http://schemas.openxmlformats.org/drawingml/2006/main">
               <a:ext uri="{FF2B5EF4-FFF2-40B4-BE49-F238E27FC236}">
-                <a16:creationId xmlns:a16="http://schemas.microsoft.com/office/drawing/2014/main" id="{872B1970-7F7A-4BE6-B098-63D6EBEDDB96}"/>
+                <a16:creationId xmlns:a16="http://schemas.microsoft.com/office/drawing/2014/main" id="{0CE57BE1-BF7A-4D8F-B8FA-202295FAAD06}"/>
               </a:ext>
             </a:extLst>
           </p:cNvPr>
@@ -13903,7 +13911,7 @@
           <p:cNvPr id="19" name="">
             <a:extLst xmlns:a="http://schemas.openxmlformats.org/drawingml/2006/main">
               <a:ext uri="{FF2B5EF4-FFF2-40B4-BE49-F238E27FC236}">
-                <a16:creationId xmlns:a16="http://schemas.microsoft.com/office/drawing/2014/main" id="{6177A132-3993-4684-B967-9B90D8B7BF2C}"/>
+                <a16:creationId xmlns:a16="http://schemas.microsoft.com/office/drawing/2014/main" id="{800B5D68-2098-4B85-838B-F6F3319CCEB1}"/>
               </a:ext>
             </a:extLst>
           </p:cNvPr>
@@ -13935,7 +13943,7 @@
           <p:cNvPr id="20" name="">
             <a:extLst xmlns:a="http://schemas.openxmlformats.org/drawingml/2006/main">
               <a:ext uri="{FF2B5EF4-FFF2-40B4-BE49-F238E27FC236}">
-                <a16:creationId xmlns:a16="http://schemas.microsoft.com/office/drawing/2014/main" id="{4185BFED-D037-4F05-97EC-78B1003E42A4}"/>
+                <a16:creationId xmlns:a16="http://schemas.microsoft.com/office/drawing/2014/main" id="{51E6F015-6EAB-49F5-9D94-90E223058059}"/>
               </a:ext>
             </a:extLst>
           </p:cNvPr>
@@ -13992,7 +14000,7 @@
           <p:cNvPr id="21" name="">
             <a:extLst xmlns:a="http://schemas.openxmlformats.org/drawingml/2006/main">
               <a:ext uri="{FF2B5EF4-FFF2-40B4-BE49-F238E27FC236}">
-                <a16:creationId xmlns:a16="http://schemas.microsoft.com/office/drawing/2014/main" id="{F43DB051-689D-4D80-B604-EB457FA5C294}"/>
+                <a16:creationId xmlns:a16="http://schemas.microsoft.com/office/drawing/2014/main" id="{65C571B3-5FE3-4288-A6CF-9AD727D7E781}"/>
               </a:ext>
             </a:extLst>
           </p:cNvPr>
@@ -14047,7 +14055,7 @@
     </p:spTree>
     <p:extLst>
       <p:ext uri="{BB962C8B-B14F-4D97-AF65-F5344CB8AC3E}">
-        <p14:creationId xmlns:p14="http://schemas.microsoft.com/office/powerpoint/2010/main" val="700416243"/>
+        <p14:creationId xmlns:p14="http://schemas.microsoft.com/office/powerpoint/2010/main" val="210417973"/>
       </p:ext>
     </p:extLst>
   </p:cSld>
